--- a/docs/plots/carbo/jx_carbo_adjcif_throm3.pptx
+++ b/docs/plots/carbo/jx_carbo_adjcif_throm3.pptx
@@ -2271,7 +2271,7 @@
           </p:nvSpPr>
           <p:spPr>
             <a:xfrm>
-              <a:off x="972874" y="5149320"/>
+              <a:off x="972874" y="5157129"/>
               <a:ext cx="7644336" cy="0"/>
             </a:xfrm>
             <a:custGeom>
@@ -2314,7 +2314,7 @@
           </p:nvSpPr>
           <p:spPr>
             <a:xfrm>
-              <a:off x="972874" y="4287116"/>
+              <a:off x="972874" y="4310543"/>
               <a:ext cx="7644336" cy="0"/>
             </a:xfrm>
             <a:custGeom>
@@ -2357,7 +2357,7 @@
           </p:nvSpPr>
           <p:spPr>
             <a:xfrm>
-              <a:off x="972874" y="3424913"/>
+              <a:off x="972874" y="3463957"/>
               <a:ext cx="7644336" cy="0"/>
             </a:xfrm>
             <a:custGeom>
@@ -2400,21 +2400,21 @@
           </p:nvSpPr>
           <p:spPr>
             <a:xfrm>
-              <a:off x="1413002" y="2583293"/>
-              <a:ext cx="0" cy="3139848"/>
+              <a:off x="972874" y="2617371"/>
+              <a:ext cx="7644336" cy="0"/>
             </a:xfrm>
             <a:custGeom>
               <a:avLst/>
               <a:pathLst>
-                <a:path w="0" h="3139848">
+                <a:path w="7644336" h="0">
                   <a:moveTo>
-                    <a:pt x="0" y="3139848"/>
+                    <a:pt x="0" y="0"/>
                   </a:moveTo>
                   <a:lnTo>
-                    <a:pt x="0" y="0"/>
-                  </a:lnTo>
-                  <a:lnTo>
-                    <a:pt x="0" y="0"/>
+                    <a:pt x="7644336" y="0"/>
+                  </a:lnTo>
+                  <a:lnTo>
+                    <a:pt x="7644336" y="0"/>
                   </a:lnTo>
                 </a:path>
               </a:pathLst>
@@ -2443,7 +2443,7 @@
           </p:nvSpPr>
           <p:spPr>
             <a:xfrm>
-              <a:off x="3266175" y="2583293"/>
+              <a:off x="1413002" y="2583293"/>
               <a:ext cx="0" cy="3139848"/>
             </a:xfrm>
             <a:custGeom>
@@ -2486,7 +2486,7 @@
           </p:nvSpPr>
           <p:spPr>
             <a:xfrm>
-              <a:off x="5119347" y="2583293"/>
+              <a:off x="3266175" y="2583293"/>
               <a:ext cx="0" cy="3139848"/>
             </a:xfrm>
             <a:custGeom>
@@ -2529,7 +2529,7 @@
           </p:nvSpPr>
           <p:spPr>
             <a:xfrm>
-              <a:off x="6972520" y="2583293"/>
+              <a:off x="5119347" y="2583293"/>
               <a:ext cx="0" cy="3139848"/>
             </a:xfrm>
             <a:custGeom>
@@ -2572,26 +2572,26 @@
           </p:nvSpPr>
           <p:spPr>
             <a:xfrm>
-              <a:off x="972874" y="5580422"/>
-              <a:ext cx="7644336" cy="0"/>
+              <a:off x="6972520" y="2583293"/>
+              <a:ext cx="0" cy="3139848"/>
             </a:xfrm>
             <a:custGeom>
               <a:avLst/>
               <a:pathLst>
-                <a:path w="7644336" h="0">
+                <a:path w="0" h="3139848">
                   <a:moveTo>
+                    <a:pt x="0" y="3139848"/>
+                  </a:moveTo>
+                  <a:lnTo>
                     <a:pt x="0" y="0"/>
-                  </a:moveTo>
-                  <a:lnTo>
-                    <a:pt x="7644336" y="0"/>
-                  </a:lnTo>
-                  <a:lnTo>
-                    <a:pt x="7644336" y="0"/>
+                  </a:lnTo>
+                  <a:lnTo>
+                    <a:pt x="0" y="0"/>
                   </a:lnTo>
                 </a:path>
               </a:pathLst>
             </a:custGeom>
-            <a:ln w="13550" cap="flat">
+            <a:ln w="6775" cap="flat">
               <a:solidFill>
                 <a:srgbClr val="EBEBEB">
                   <a:alpha val="100000"/>
@@ -2615,7 +2615,7 @@
           </p:nvSpPr>
           <p:spPr>
             <a:xfrm>
-              <a:off x="972874" y="4718218"/>
+              <a:off x="972874" y="5580422"/>
               <a:ext cx="7644336" cy="0"/>
             </a:xfrm>
             <a:custGeom>
@@ -2658,7 +2658,7 @@
           </p:nvSpPr>
           <p:spPr>
             <a:xfrm>
-              <a:off x="972874" y="3856015"/>
+              <a:off x="972874" y="4733836"/>
               <a:ext cx="7644336" cy="0"/>
             </a:xfrm>
             <a:custGeom>
@@ -2701,7 +2701,7 @@
           </p:nvSpPr>
           <p:spPr>
             <a:xfrm>
-              <a:off x="972874" y="2993811"/>
+              <a:off x="972874" y="3887250"/>
               <a:ext cx="7644336" cy="0"/>
             </a:xfrm>
             <a:custGeom>
@@ -2744,21 +2744,21 @@
           </p:nvSpPr>
           <p:spPr>
             <a:xfrm>
-              <a:off x="2339589" y="2583293"/>
-              <a:ext cx="0" cy="3139848"/>
+              <a:off x="972874" y="3040664"/>
+              <a:ext cx="7644336" cy="0"/>
             </a:xfrm>
             <a:custGeom>
               <a:avLst/>
               <a:pathLst>
-                <a:path w="0" h="3139848">
+                <a:path w="7644336" h="0">
                   <a:moveTo>
-                    <a:pt x="0" y="3139848"/>
+                    <a:pt x="0" y="0"/>
                   </a:moveTo>
                   <a:lnTo>
-                    <a:pt x="0" y="0"/>
-                  </a:lnTo>
-                  <a:lnTo>
-                    <a:pt x="0" y="0"/>
+                    <a:pt x="7644336" y="0"/>
+                  </a:lnTo>
+                  <a:lnTo>
+                    <a:pt x="7644336" y="0"/>
                   </a:lnTo>
                 </a:path>
               </a:pathLst>
@@ -2787,7 +2787,7 @@
           </p:nvSpPr>
           <p:spPr>
             <a:xfrm>
-              <a:off x="4192761" y="2583293"/>
+              <a:off x="2339589" y="2583293"/>
               <a:ext cx="0" cy="3139848"/>
             </a:xfrm>
             <a:custGeom>
@@ -2830,7 +2830,7 @@
           </p:nvSpPr>
           <p:spPr>
             <a:xfrm>
-              <a:off x="6045934" y="2583293"/>
+              <a:off x="4192761" y="2583293"/>
               <a:ext cx="0" cy="3139848"/>
             </a:xfrm>
             <a:custGeom>
@@ -2873,7 +2873,7 @@
           </p:nvSpPr>
           <p:spPr>
             <a:xfrm>
-              <a:off x="7899106" y="2583293"/>
+              <a:off x="6045934" y="2583293"/>
               <a:ext cx="0" cy="3139848"/>
             </a:xfrm>
             <a:custGeom>
@@ -2916,60 +2916,103 @@
           </p:nvSpPr>
           <p:spPr>
             <a:xfrm>
-              <a:off x="1320344" y="5081483"/>
-              <a:ext cx="6949396" cy="453787"/>
+              <a:off x="7899106" y="2583293"/>
+              <a:ext cx="0" cy="3139848"/>
             </a:xfrm>
             <a:custGeom>
               <a:avLst/>
               <a:pathLst>
-                <a:path w="6949396" h="453787">
+                <a:path w="0" h="3139848">
                   <a:moveTo>
-                    <a:pt x="0" y="453787"/>
+                    <a:pt x="0" y="3139848"/>
                   </a:moveTo>
                   <a:lnTo>
-                    <a:pt x="185317" y="453787"/>
-                  </a:lnTo>
-                  <a:lnTo>
-                    <a:pt x="185317" y="408681"/>
-                  </a:lnTo>
-                  <a:lnTo>
-                    <a:pt x="277975" y="408681"/>
-                  </a:lnTo>
-                  <a:lnTo>
-                    <a:pt x="277975" y="315831"/>
-                  </a:lnTo>
-                  <a:lnTo>
-                    <a:pt x="370634" y="315831"/>
-                  </a:lnTo>
-                  <a:lnTo>
-                    <a:pt x="370634" y="264706"/>
-                  </a:lnTo>
-                  <a:lnTo>
-                    <a:pt x="463293" y="264706"/>
-                  </a:lnTo>
-                  <a:lnTo>
-                    <a:pt x="463293" y="213132"/>
-                  </a:lnTo>
-                  <a:lnTo>
-                    <a:pt x="1945831" y="213132"/>
-                  </a:lnTo>
-                  <a:lnTo>
-                    <a:pt x="1945831" y="161750"/>
-                  </a:lnTo>
-                  <a:lnTo>
-                    <a:pt x="3243051" y="161750"/>
-                  </a:lnTo>
-                  <a:lnTo>
-                    <a:pt x="3243051" y="109854"/>
-                  </a:lnTo>
-                  <a:lnTo>
-                    <a:pt x="6300786" y="109854"/>
-                  </a:lnTo>
-                  <a:lnTo>
-                    <a:pt x="6300786" y="56445"/>
-                  </a:lnTo>
-                  <a:lnTo>
-                    <a:pt x="6949396" y="56445"/>
+                    <a:pt x="0" y="0"/>
+                  </a:lnTo>
+                  <a:lnTo>
+                    <a:pt x="0" y="0"/>
+                  </a:lnTo>
+                </a:path>
+              </a:pathLst>
+            </a:custGeom>
+            <a:ln w="13550" cap="flat">
+              <a:solidFill>
+                <a:srgbClr val="EBEBEB">
+                  <a:alpha val="100000"/>
+                </a:srgbClr>
+              </a:solidFill>
+              <a:prstDash val="solid"/>
+              <a:round/>
+            </a:ln>
+          </p:spPr>
+          <p:txBody>
+            <a:bodyPr/>
+            <a:lstStyle/>
+            <a:p/>
+          </p:txBody>
+        </p:sp>
+        <p:sp>
+          <p:nvSpPr>
+            <p:cNvPr id="20" name="pl20"/>
+            <p:cNvSpPr/>
+            <p:nvPr/>
+          </p:nvSpPr>
+          <p:spPr>
+            <a:xfrm>
+              <a:off x="1320344" y="5098260"/>
+              <a:ext cx="6949396" cy="438485"/>
+            </a:xfrm>
+            <a:custGeom>
+              <a:avLst/>
+              <a:pathLst>
+                <a:path w="6949396" h="438485">
+                  <a:moveTo>
+                    <a:pt x="0" y="438485"/>
+                  </a:moveTo>
+                  <a:lnTo>
+                    <a:pt x="185317" y="438485"/>
+                  </a:lnTo>
+                  <a:lnTo>
+                    <a:pt x="185317" y="394872"/>
+                  </a:lnTo>
+                  <a:lnTo>
+                    <a:pt x="277975" y="394872"/>
+                  </a:lnTo>
+                  <a:lnTo>
+                    <a:pt x="277975" y="305202"/>
+                  </a:lnTo>
+                  <a:lnTo>
+                    <a:pt x="370634" y="305202"/>
+                  </a:lnTo>
+                  <a:lnTo>
+                    <a:pt x="370634" y="256013"/>
+                  </a:lnTo>
+                  <a:lnTo>
+                    <a:pt x="463293" y="256013"/>
+                  </a:lnTo>
+                  <a:lnTo>
+                    <a:pt x="463293" y="206289"/>
+                  </a:lnTo>
+                  <a:lnTo>
+                    <a:pt x="1945831" y="206289"/>
+                  </a:lnTo>
+                  <a:lnTo>
+                    <a:pt x="1945831" y="156734"/>
+                  </a:lnTo>
+                  <a:lnTo>
+                    <a:pt x="3243051" y="156734"/>
+                  </a:lnTo>
+                  <a:lnTo>
+                    <a:pt x="3243051" y="106583"/>
+                  </a:lnTo>
+                  <a:lnTo>
+                    <a:pt x="6300786" y="106583"/>
+                  </a:lnTo>
+                  <a:lnTo>
+                    <a:pt x="6300786" y="54882"/>
+                  </a:lnTo>
+                  <a:lnTo>
+                    <a:pt x="6949396" y="54882"/>
                   </a:lnTo>
                   <a:lnTo>
                     <a:pt x="6949396" y="0"/>
@@ -2995,66 +3038,66 @@
         </p:sp>
         <p:sp>
           <p:nvSpPr>
-            <p:cNvPr id="20" name="pl20"/>
+            <p:cNvPr id="21" name="pl21"/>
             <p:cNvSpPr/>
             <p:nvPr/>
           </p:nvSpPr>
           <p:spPr>
             <a:xfrm>
               <a:off x="1320344" y="2861938"/>
-              <a:ext cx="6949396" cy="2445715"/>
+              <a:ext cx="6949396" cy="2445517"/>
             </a:xfrm>
             <a:custGeom>
               <a:avLst/>
               <a:pathLst>
-                <a:path w="6949396" h="2445715">
+                <a:path w="6949396" h="2445517">
                   <a:moveTo>
-                    <a:pt x="0" y="2445715"/>
+                    <a:pt x="0" y="2445517"/>
                   </a:moveTo>
                   <a:lnTo>
-                    <a:pt x="185317" y="2445715"/>
-                  </a:lnTo>
-                  <a:lnTo>
-                    <a:pt x="185317" y="2179043"/>
-                  </a:lnTo>
-                  <a:lnTo>
-                    <a:pt x="277975" y="2179043"/>
-                  </a:lnTo>
-                  <a:lnTo>
-                    <a:pt x="277975" y="1647666"/>
-                  </a:lnTo>
-                  <a:lnTo>
-                    <a:pt x="370634" y="1647666"/>
-                  </a:lnTo>
-                  <a:lnTo>
-                    <a:pt x="370634" y="1364740"/>
-                  </a:lnTo>
-                  <a:lnTo>
-                    <a:pt x="463293" y="1364740"/>
-                  </a:lnTo>
-                  <a:lnTo>
-                    <a:pt x="463293" y="1085978"/>
-                  </a:lnTo>
-                  <a:lnTo>
-                    <a:pt x="1945831" y="1085978"/>
-                  </a:lnTo>
-                  <a:lnTo>
-                    <a:pt x="1945831" y="814668"/>
-                  </a:lnTo>
-                  <a:lnTo>
-                    <a:pt x="3243051" y="814668"/>
-                  </a:lnTo>
-                  <a:lnTo>
-                    <a:pt x="3243051" y="546919"/>
-                  </a:lnTo>
-                  <a:lnTo>
-                    <a:pt x="6300786" y="546919"/>
-                  </a:lnTo>
-                  <a:lnTo>
-                    <a:pt x="6300786" y="277723"/>
-                  </a:lnTo>
-                  <a:lnTo>
-                    <a:pt x="6949396" y="277723"/>
+                    <a:pt x="185317" y="2445517"/>
+                  </a:lnTo>
+                  <a:lnTo>
+                    <a:pt x="185317" y="2178757"/>
+                  </a:lnTo>
+                  <a:lnTo>
+                    <a:pt x="277975" y="2178757"/>
+                  </a:lnTo>
+                  <a:lnTo>
+                    <a:pt x="277975" y="1647768"/>
+                  </a:lnTo>
+                  <a:lnTo>
+                    <a:pt x="370634" y="1647768"/>
+                  </a:lnTo>
+                  <a:lnTo>
+                    <a:pt x="370634" y="1366070"/>
+                  </a:lnTo>
+                  <a:lnTo>
+                    <a:pt x="463293" y="1366070"/>
+                  </a:lnTo>
+                  <a:lnTo>
+                    <a:pt x="463293" y="1087904"/>
+                  </a:lnTo>
+                  <a:lnTo>
+                    <a:pt x="1945831" y="1087904"/>
+                  </a:lnTo>
+                  <a:lnTo>
+                    <a:pt x="1945831" y="817062"/>
+                  </a:lnTo>
+                  <a:lnTo>
+                    <a:pt x="3243051" y="817062"/>
+                  </a:lnTo>
+                  <a:lnTo>
+                    <a:pt x="3243051" y="549223"/>
+                  </a:lnTo>
+                  <a:lnTo>
+                    <a:pt x="6300786" y="549223"/>
+                  </a:lnTo>
+                  <a:lnTo>
+                    <a:pt x="6300786" y="279490"/>
+                  </a:lnTo>
+                  <a:lnTo>
+                    <a:pt x="6949396" y="279490"/>
                   </a:lnTo>
                   <a:lnTo>
                     <a:pt x="6949396" y="0"/>
@@ -3080,7 +3123,7 @@
         </p:sp>
         <p:sp>
           <p:nvSpPr>
-            <p:cNvPr id="21" name="tx21"/>
+            <p:cNvPr id="22" name="tx22"/>
             <p:cNvSpPr/>
             <p:nvPr/>
           </p:nvSpPr>
@@ -3126,13 +3169,13 @@
         </p:sp>
         <p:sp>
           <p:nvSpPr>
-            <p:cNvPr id="22" name="tx22"/>
+            <p:cNvPr id="23" name="tx23"/>
             <p:cNvSpPr/>
             <p:nvPr/>
           </p:nvSpPr>
           <p:spPr>
             <a:xfrm>
-              <a:off x="692708" y="4678167"/>
+              <a:off x="692708" y="4693785"/>
               <a:ext cx="217535" cy="80101"/>
             </a:xfrm>
             <a:prstGeom prst="rect">
@@ -3172,13 +3215,13 @@
         </p:sp>
         <p:sp>
           <p:nvSpPr>
-            <p:cNvPr id="23" name="tx23"/>
+            <p:cNvPr id="24" name="tx24"/>
             <p:cNvSpPr/>
             <p:nvPr/>
           </p:nvSpPr>
           <p:spPr>
             <a:xfrm>
-              <a:off x="692708" y="3815964"/>
+              <a:off x="692708" y="3847199"/>
               <a:ext cx="217535" cy="80101"/>
             </a:xfrm>
             <a:prstGeom prst="rect">
@@ -3218,13 +3261,13 @@
         </p:sp>
         <p:sp>
           <p:nvSpPr>
-            <p:cNvPr id="24" name="tx24"/>
+            <p:cNvPr id="25" name="tx25"/>
             <p:cNvSpPr/>
             <p:nvPr/>
           </p:nvSpPr>
           <p:spPr>
             <a:xfrm>
-              <a:off x="692708" y="2953760"/>
+              <a:off x="692708" y="3000614"/>
               <a:ext cx="217535" cy="80101"/>
             </a:xfrm>
             <a:prstGeom prst="rect">
@@ -3264,7 +3307,7 @@
         </p:sp>
         <p:sp>
           <p:nvSpPr>
-            <p:cNvPr id="25" name="tx25"/>
+            <p:cNvPr id="26" name="tx26"/>
             <p:cNvSpPr/>
             <p:nvPr/>
           </p:nvSpPr>
@@ -3310,7 +3353,7 @@
         </p:sp>
         <p:sp>
           <p:nvSpPr>
-            <p:cNvPr id="26" name="tx26"/>
+            <p:cNvPr id="27" name="tx27"/>
             <p:cNvSpPr/>
             <p:nvPr/>
           </p:nvSpPr>
@@ -3356,7 +3399,7 @@
         </p:sp>
         <p:sp>
           <p:nvSpPr>
-            <p:cNvPr id="27" name="tx27"/>
+            <p:cNvPr id="28" name="tx28"/>
             <p:cNvSpPr/>
             <p:nvPr/>
           </p:nvSpPr>
@@ -3402,7 +3445,7 @@
         </p:sp>
         <p:sp>
           <p:nvSpPr>
-            <p:cNvPr id="28" name="tx28"/>
+            <p:cNvPr id="29" name="tx29"/>
             <p:cNvSpPr/>
             <p:nvPr/>
           </p:nvSpPr>
@@ -3448,7 +3491,7 @@
         </p:sp>
         <p:sp>
           <p:nvSpPr>
-            <p:cNvPr id="29" name="tx29"/>
+            <p:cNvPr id="30" name="tx30"/>
             <p:cNvSpPr/>
             <p:nvPr/>
           </p:nvSpPr>
@@ -3494,7 +3537,7 @@
         </p:sp>
         <p:sp>
           <p:nvSpPr>
-            <p:cNvPr id="30" name="tx30"/>
+            <p:cNvPr id="31" name="tx31"/>
             <p:cNvSpPr/>
             <p:nvPr/>
           </p:nvSpPr>
@@ -3540,7 +3583,7 @@
         </p:sp>
         <p:sp>
           <p:nvSpPr>
-            <p:cNvPr id="31" name="pl31"/>
+            <p:cNvPr id="32" name="pl32"/>
             <p:cNvSpPr/>
             <p:nvPr/>
           </p:nvSpPr>
@@ -3580,7 +3623,7 @@
         </p:sp>
         <p:sp>
           <p:nvSpPr>
-            <p:cNvPr id="32" name="pl32"/>
+            <p:cNvPr id="33" name="pl33"/>
             <p:cNvSpPr/>
             <p:nvPr/>
           </p:nvSpPr>
@@ -3620,7 +3663,7 @@
         </p:sp>
         <p:sp>
           <p:nvSpPr>
-            <p:cNvPr id="33" name="tx33"/>
+            <p:cNvPr id="34" name="tx34"/>
             <p:cNvSpPr/>
             <p:nvPr/>
           </p:nvSpPr>
@@ -3666,7 +3709,7 @@
         </p:sp>
         <p:sp>
           <p:nvSpPr>
-            <p:cNvPr id="34" name="tx34"/>
+            <p:cNvPr id="35" name="tx35"/>
             <p:cNvSpPr/>
             <p:nvPr/>
           </p:nvSpPr>
@@ -3712,7 +3755,7 @@
         </p:sp>
         <p:sp>
           <p:nvSpPr>
-            <p:cNvPr id="35" name="tx35"/>
+            <p:cNvPr id="36" name="tx36"/>
             <p:cNvSpPr/>
             <p:nvPr/>
           </p:nvSpPr>
@@ -3751,14 +3794,14 @@
                   <a:latin typeface="Helvetica"/>
                   <a:cs typeface="Helvetica"/>
                 </a:rPr>
-                <a:t>Discrep &gt;= +25 vs &lt;+25: subHR = 6.11 (95% CI 1.17-31.82), p = 0.032</a:t>
+                <a:t>Discrep &gt;= +25 vs &lt;+25: subHR = 6.32 (95% CI 1.00-39.79), p = 0.050</a:t>
               </a:r>
             </a:p>
           </p:txBody>
         </p:sp>
         <p:sp>
           <p:nvSpPr>
-            <p:cNvPr id="36" name="tx36"/>
+            <p:cNvPr id="37" name="tx37"/>
             <p:cNvSpPr/>
             <p:nvPr/>
           </p:nvSpPr>

--- a/docs/plots/carbo/jx_carbo_adjcif_throm3.pptx
+++ b/docs/plots/carbo/jx_carbo_adjcif_throm3.pptx
@@ -2271,7 +2271,7 @@
           </p:nvSpPr>
           <p:spPr>
             <a:xfrm>
-              <a:off x="972874" y="5157129"/>
+              <a:off x="972874" y="5102376"/>
               <a:ext cx="7644336" cy="0"/>
             </a:xfrm>
             <a:custGeom>
@@ -2314,7 +2314,7 @@
           </p:nvSpPr>
           <p:spPr>
             <a:xfrm>
-              <a:off x="972874" y="4310543"/>
+              <a:off x="972874" y="4146285"/>
               <a:ext cx="7644336" cy="0"/>
             </a:xfrm>
             <a:custGeom>
@@ -2357,7 +2357,7 @@
           </p:nvSpPr>
           <p:spPr>
             <a:xfrm>
-              <a:off x="972874" y="3463957"/>
+              <a:off x="972874" y="3190193"/>
               <a:ext cx="7644336" cy="0"/>
             </a:xfrm>
             <a:custGeom>
@@ -2400,21 +2400,21 @@
           </p:nvSpPr>
           <p:spPr>
             <a:xfrm>
-              <a:off x="972874" y="2617371"/>
-              <a:ext cx="7644336" cy="0"/>
+              <a:off x="1413002" y="2583293"/>
+              <a:ext cx="0" cy="3139848"/>
             </a:xfrm>
             <a:custGeom>
               <a:avLst/>
               <a:pathLst>
-                <a:path w="7644336" h="0">
+                <a:path w="0" h="3139848">
                   <a:moveTo>
+                    <a:pt x="0" y="3139848"/>
+                  </a:moveTo>
+                  <a:lnTo>
                     <a:pt x="0" y="0"/>
-                  </a:moveTo>
-                  <a:lnTo>
-                    <a:pt x="7644336" y="0"/>
-                  </a:lnTo>
-                  <a:lnTo>
-                    <a:pt x="7644336" y="0"/>
+                  </a:lnTo>
+                  <a:lnTo>
+                    <a:pt x="0" y="0"/>
                   </a:lnTo>
                 </a:path>
               </a:pathLst>
@@ -2443,7 +2443,7 @@
           </p:nvSpPr>
           <p:spPr>
             <a:xfrm>
-              <a:off x="1413002" y="2583293"/>
+              <a:off x="3266175" y="2583293"/>
               <a:ext cx="0" cy="3139848"/>
             </a:xfrm>
             <a:custGeom>
@@ -2486,7 +2486,7 @@
           </p:nvSpPr>
           <p:spPr>
             <a:xfrm>
-              <a:off x="3266175" y="2583293"/>
+              <a:off x="5119347" y="2583293"/>
               <a:ext cx="0" cy="3139848"/>
             </a:xfrm>
             <a:custGeom>
@@ -2529,7 +2529,7 @@
           </p:nvSpPr>
           <p:spPr>
             <a:xfrm>
-              <a:off x="5119347" y="2583293"/>
+              <a:off x="6972520" y="2583293"/>
               <a:ext cx="0" cy="3139848"/>
             </a:xfrm>
             <a:custGeom>
@@ -2572,26 +2572,26 @@
           </p:nvSpPr>
           <p:spPr>
             <a:xfrm>
-              <a:off x="6972520" y="2583293"/>
-              <a:ext cx="0" cy="3139848"/>
+              <a:off x="972874" y="5580422"/>
+              <a:ext cx="7644336" cy="0"/>
             </a:xfrm>
             <a:custGeom>
               <a:avLst/>
               <a:pathLst>
-                <a:path w="0" h="3139848">
+                <a:path w="7644336" h="0">
                   <a:moveTo>
-                    <a:pt x="0" y="3139848"/>
+                    <a:pt x="0" y="0"/>
                   </a:moveTo>
                   <a:lnTo>
-                    <a:pt x="0" y="0"/>
-                  </a:lnTo>
-                  <a:lnTo>
-                    <a:pt x="0" y="0"/>
+                    <a:pt x="7644336" y="0"/>
+                  </a:lnTo>
+                  <a:lnTo>
+                    <a:pt x="7644336" y="0"/>
                   </a:lnTo>
                 </a:path>
               </a:pathLst>
             </a:custGeom>
-            <a:ln w="6775" cap="flat">
+            <a:ln w="13550" cap="flat">
               <a:solidFill>
                 <a:srgbClr val="EBEBEB">
                   <a:alpha val="100000"/>
@@ -2615,7 +2615,7 @@
           </p:nvSpPr>
           <p:spPr>
             <a:xfrm>
-              <a:off x="972874" y="5580422"/>
+              <a:off x="972874" y="4624330"/>
               <a:ext cx="7644336" cy="0"/>
             </a:xfrm>
             <a:custGeom>
@@ -2658,7 +2658,7 @@
           </p:nvSpPr>
           <p:spPr>
             <a:xfrm>
-              <a:off x="972874" y="4733836"/>
+              <a:off x="972874" y="3668239"/>
               <a:ext cx="7644336" cy="0"/>
             </a:xfrm>
             <a:custGeom>
@@ -2701,7 +2701,7 @@
           </p:nvSpPr>
           <p:spPr>
             <a:xfrm>
-              <a:off x="972874" y="3887250"/>
+              <a:off x="972874" y="2712148"/>
               <a:ext cx="7644336" cy="0"/>
             </a:xfrm>
             <a:custGeom>
@@ -2744,21 +2744,21 @@
           </p:nvSpPr>
           <p:spPr>
             <a:xfrm>
-              <a:off x="972874" y="3040664"/>
-              <a:ext cx="7644336" cy="0"/>
+              <a:off x="2339589" y="2583293"/>
+              <a:ext cx="0" cy="3139848"/>
             </a:xfrm>
             <a:custGeom>
               <a:avLst/>
               <a:pathLst>
-                <a:path w="7644336" h="0">
+                <a:path w="0" h="3139848">
                   <a:moveTo>
+                    <a:pt x="0" y="3139848"/>
+                  </a:moveTo>
+                  <a:lnTo>
                     <a:pt x="0" y="0"/>
-                  </a:moveTo>
-                  <a:lnTo>
-                    <a:pt x="7644336" y="0"/>
-                  </a:lnTo>
-                  <a:lnTo>
-                    <a:pt x="7644336" y="0"/>
+                  </a:lnTo>
+                  <a:lnTo>
+                    <a:pt x="0" y="0"/>
                   </a:lnTo>
                 </a:path>
               </a:pathLst>
@@ -2787,7 +2787,7 @@
           </p:nvSpPr>
           <p:spPr>
             <a:xfrm>
-              <a:off x="2339589" y="2583293"/>
+              <a:off x="4192761" y="2583293"/>
               <a:ext cx="0" cy="3139848"/>
             </a:xfrm>
             <a:custGeom>
@@ -2830,7 +2830,7 @@
           </p:nvSpPr>
           <p:spPr>
             <a:xfrm>
-              <a:off x="4192761" y="2583293"/>
+              <a:off x="6045934" y="2583293"/>
               <a:ext cx="0" cy="3139848"/>
             </a:xfrm>
             <a:custGeom>
@@ -2873,7 +2873,7 @@
           </p:nvSpPr>
           <p:spPr>
             <a:xfrm>
-              <a:off x="6045934" y="2583293"/>
+              <a:off x="7899106" y="2583293"/>
               <a:ext cx="0" cy="3139848"/>
             </a:xfrm>
             <a:custGeom>
@@ -2916,28 +2916,70 @@
           </p:nvSpPr>
           <p:spPr>
             <a:xfrm>
-              <a:off x="7899106" y="2583293"/>
-              <a:ext cx="0" cy="3139848"/>
+              <a:off x="1320344" y="4981039"/>
+              <a:ext cx="6949396" cy="545357"/>
             </a:xfrm>
             <a:custGeom>
               <a:avLst/>
               <a:pathLst>
-                <a:path w="0" h="3139848">
+                <a:path w="6949396" h="545357">
                   <a:moveTo>
-                    <a:pt x="0" y="3139848"/>
+                    <a:pt x="0" y="545357"/>
                   </a:moveTo>
                   <a:lnTo>
-                    <a:pt x="0" y="0"/>
-                  </a:lnTo>
-                  <a:lnTo>
-                    <a:pt x="0" y="0"/>
+                    <a:pt x="185317" y="545357"/>
+                  </a:lnTo>
+                  <a:lnTo>
+                    <a:pt x="185317" y="491413"/>
+                  </a:lnTo>
+                  <a:lnTo>
+                    <a:pt x="277975" y="491413"/>
+                  </a:lnTo>
+                  <a:lnTo>
+                    <a:pt x="277975" y="380649"/>
+                  </a:lnTo>
+                  <a:lnTo>
+                    <a:pt x="370634" y="380649"/>
+                  </a:lnTo>
+                  <a:lnTo>
+                    <a:pt x="370634" y="319351"/>
+                  </a:lnTo>
+                  <a:lnTo>
+                    <a:pt x="463293" y="319351"/>
+                  </a:lnTo>
+                  <a:lnTo>
+                    <a:pt x="463293" y="257264"/>
+                  </a:lnTo>
+                  <a:lnTo>
+                    <a:pt x="1945831" y="257264"/>
+                  </a:lnTo>
+                  <a:lnTo>
+                    <a:pt x="1945831" y="195473"/>
+                  </a:lnTo>
+                  <a:lnTo>
+                    <a:pt x="3243051" y="195473"/>
+                  </a:lnTo>
+                  <a:lnTo>
+                    <a:pt x="3243051" y="132975"/>
+                  </a:lnTo>
+                  <a:lnTo>
+                    <a:pt x="6300786" y="132975"/>
+                  </a:lnTo>
+                  <a:lnTo>
+                    <a:pt x="6300786" y="68377"/>
+                  </a:lnTo>
+                  <a:lnTo>
+                    <a:pt x="6949396" y="68377"/>
+                  </a:lnTo>
+                  <a:lnTo>
+                    <a:pt x="6949396" y="0"/>
                   </a:lnTo>
                 </a:path>
               </a:pathLst>
             </a:custGeom>
-            <a:ln w="13550" cap="flat">
+            <a:ln w="27101" cap="flat">
               <a:solidFill>
-                <a:srgbClr val="EBEBEB">
+                <a:srgbClr val="1F78B4">
                   <a:alpha val="100000"/>
                 </a:srgbClr>
               </a:solidFill>
@@ -2959,145 +3001,60 @@
           </p:nvSpPr>
           <p:spPr>
             <a:xfrm>
-              <a:off x="1320344" y="5098260"/>
-              <a:ext cx="6949396" cy="438485"/>
+              <a:off x="1320344" y="2861938"/>
+              <a:ext cx="6949396" cy="2444447"/>
             </a:xfrm>
             <a:custGeom>
               <a:avLst/>
               <a:pathLst>
-                <a:path w="6949396" h="438485">
+                <a:path w="6949396" h="2444447">
                   <a:moveTo>
-                    <a:pt x="0" y="438485"/>
+                    <a:pt x="0" y="2444447"/>
                   </a:moveTo>
                   <a:lnTo>
-                    <a:pt x="185317" y="438485"/>
-                  </a:lnTo>
-                  <a:lnTo>
-                    <a:pt x="185317" y="394872"/>
-                  </a:lnTo>
-                  <a:lnTo>
-                    <a:pt x="277975" y="394872"/>
-                  </a:lnTo>
-                  <a:lnTo>
-                    <a:pt x="277975" y="305202"/>
-                  </a:lnTo>
-                  <a:lnTo>
-                    <a:pt x="370634" y="305202"/>
-                  </a:lnTo>
-                  <a:lnTo>
-                    <a:pt x="370634" y="256013"/>
-                  </a:lnTo>
-                  <a:lnTo>
-                    <a:pt x="463293" y="256013"/>
-                  </a:lnTo>
-                  <a:lnTo>
-                    <a:pt x="463293" y="206289"/>
-                  </a:lnTo>
-                  <a:lnTo>
-                    <a:pt x="1945831" y="206289"/>
-                  </a:lnTo>
-                  <a:lnTo>
-                    <a:pt x="1945831" y="156734"/>
-                  </a:lnTo>
-                  <a:lnTo>
-                    <a:pt x="3243051" y="156734"/>
-                  </a:lnTo>
-                  <a:lnTo>
-                    <a:pt x="3243051" y="106583"/>
-                  </a:lnTo>
-                  <a:lnTo>
-                    <a:pt x="6300786" y="106583"/>
-                  </a:lnTo>
-                  <a:lnTo>
-                    <a:pt x="6300786" y="54882"/>
-                  </a:lnTo>
-                  <a:lnTo>
-                    <a:pt x="6949396" y="54882"/>
-                  </a:lnTo>
-                  <a:lnTo>
-                    <a:pt x="6949396" y="0"/>
-                  </a:lnTo>
-                </a:path>
-              </a:pathLst>
-            </a:custGeom>
-            <a:ln w="27101" cap="flat">
-              <a:solidFill>
-                <a:srgbClr val="1F78B4">
-                  <a:alpha val="100000"/>
-                </a:srgbClr>
-              </a:solidFill>
-              <a:prstDash val="solid"/>
-              <a:round/>
-            </a:ln>
-          </p:spPr>
-          <p:txBody>
-            <a:bodyPr/>
-            <a:lstStyle/>
-            <a:p/>
-          </p:txBody>
-        </p:sp>
-        <p:sp>
-          <p:nvSpPr>
-            <p:cNvPr id="21" name="pl21"/>
-            <p:cNvSpPr/>
-            <p:nvPr/>
-          </p:nvSpPr>
-          <p:spPr>
-            <a:xfrm>
-              <a:off x="1320344" y="2861938"/>
-              <a:ext cx="6949396" cy="2445517"/>
-            </a:xfrm>
-            <a:custGeom>
-              <a:avLst/>
-              <a:pathLst>
-                <a:path w="6949396" h="2445517">
-                  <a:moveTo>
-                    <a:pt x="0" y="2445517"/>
-                  </a:moveTo>
-                  <a:lnTo>
-                    <a:pt x="185317" y="2445517"/>
-                  </a:lnTo>
-                  <a:lnTo>
-                    <a:pt x="185317" y="2178757"/>
-                  </a:lnTo>
-                  <a:lnTo>
-                    <a:pt x="277975" y="2178757"/>
-                  </a:lnTo>
-                  <a:lnTo>
-                    <a:pt x="277975" y="1647768"/>
-                  </a:lnTo>
-                  <a:lnTo>
-                    <a:pt x="370634" y="1647768"/>
-                  </a:lnTo>
-                  <a:lnTo>
-                    <a:pt x="370634" y="1366070"/>
-                  </a:lnTo>
-                  <a:lnTo>
-                    <a:pt x="463293" y="1366070"/>
-                  </a:lnTo>
-                  <a:lnTo>
-                    <a:pt x="463293" y="1087904"/>
-                  </a:lnTo>
-                  <a:lnTo>
-                    <a:pt x="1945831" y="1087904"/>
-                  </a:lnTo>
-                  <a:lnTo>
-                    <a:pt x="1945831" y="817062"/>
-                  </a:lnTo>
-                  <a:lnTo>
-                    <a:pt x="3243051" y="817062"/>
-                  </a:lnTo>
-                  <a:lnTo>
-                    <a:pt x="3243051" y="549223"/>
-                  </a:lnTo>
-                  <a:lnTo>
-                    <a:pt x="6300786" y="549223"/>
-                  </a:lnTo>
-                  <a:lnTo>
-                    <a:pt x="6300786" y="279490"/>
-                  </a:lnTo>
-                  <a:lnTo>
-                    <a:pt x="6949396" y="279490"/>
+                    <a:pt x="185317" y="2444447"/>
+                  </a:lnTo>
+                  <a:lnTo>
+                    <a:pt x="185317" y="2177094"/>
+                  </a:lnTo>
+                  <a:lnTo>
+                    <a:pt x="277975" y="2177094"/>
+                  </a:lnTo>
+                  <a:lnTo>
+                    <a:pt x="277975" y="1646976"/>
+                  </a:lnTo>
+                  <a:lnTo>
+                    <a:pt x="370634" y="1646976"/>
+                  </a:lnTo>
+                  <a:lnTo>
+                    <a:pt x="370634" y="1364047"/>
+                  </a:lnTo>
+                  <a:lnTo>
+                    <a:pt x="463293" y="1364047"/>
+                  </a:lnTo>
+                  <a:lnTo>
+                    <a:pt x="463293" y="1084731"/>
+                  </a:lnTo>
+                  <a:lnTo>
+                    <a:pt x="1945831" y="1084731"/>
+                  </a:lnTo>
+                  <a:lnTo>
+                    <a:pt x="1945831" y="813758"/>
+                  </a:lnTo>
+                  <a:lnTo>
+                    <a:pt x="3243051" y="813758"/>
+                  </a:lnTo>
+                  <a:lnTo>
+                    <a:pt x="3243051" y="546557"/>
+                  </a:lnTo>
+                  <a:lnTo>
+                    <a:pt x="6300786" y="546557"/>
+                  </a:lnTo>
+                  <a:lnTo>
+                    <a:pt x="6300786" y="277403"/>
+                  </a:lnTo>
+                  <a:lnTo>
+                    <a:pt x="6949396" y="277403"/>
                   </a:lnTo>
                   <a:lnTo>
                     <a:pt x="6949396" y="0"/>
@@ -3123,7 +3080,7 @@
         </p:sp>
         <p:sp>
           <p:nvSpPr>
-            <p:cNvPr id="22" name="tx22"/>
+            <p:cNvPr id="21" name="tx21"/>
             <p:cNvSpPr/>
             <p:nvPr/>
           </p:nvSpPr>
@@ -3169,13 +3126,13 @@
         </p:sp>
         <p:sp>
           <p:nvSpPr>
-            <p:cNvPr id="23" name="tx23"/>
+            <p:cNvPr id="22" name="tx22"/>
             <p:cNvSpPr/>
             <p:nvPr/>
           </p:nvSpPr>
           <p:spPr>
             <a:xfrm>
-              <a:off x="692708" y="4693785"/>
+              <a:off x="692708" y="4584280"/>
               <a:ext cx="217535" cy="80101"/>
             </a:xfrm>
             <a:prstGeom prst="rect">
@@ -3215,13 +3172,13 @@
         </p:sp>
         <p:sp>
           <p:nvSpPr>
-            <p:cNvPr id="24" name="tx24"/>
+            <p:cNvPr id="23" name="tx23"/>
             <p:cNvSpPr/>
             <p:nvPr/>
           </p:nvSpPr>
           <p:spPr>
             <a:xfrm>
-              <a:off x="692708" y="3847199"/>
+              <a:off x="692708" y="3628188"/>
               <a:ext cx="217535" cy="80101"/>
             </a:xfrm>
             <a:prstGeom prst="rect">
@@ -3261,13 +3218,13 @@
         </p:sp>
         <p:sp>
           <p:nvSpPr>
-            <p:cNvPr id="25" name="tx25"/>
+            <p:cNvPr id="24" name="tx24"/>
             <p:cNvSpPr/>
             <p:nvPr/>
           </p:nvSpPr>
           <p:spPr>
             <a:xfrm>
-              <a:off x="692708" y="3000614"/>
+              <a:off x="692708" y="2672097"/>
               <a:ext cx="217535" cy="80101"/>
             </a:xfrm>
             <a:prstGeom prst="rect">
@@ -3307,7 +3264,7 @@
         </p:sp>
         <p:sp>
           <p:nvSpPr>
-            <p:cNvPr id="26" name="tx26"/>
+            <p:cNvPr id="25" name="tx25"/>
             <p:cNvSpPr/>
             <p:nvPr/>
           </p:nvSpPr>
@@ -3353,7 +3310,7 @@
         </p:sp>
         <p:sp>
           <p:nvSpPr>
-            <p:cNvPr id="27" name="tx27"/>
+            <p:cNvPr id="26" name="tx26"/>
             <p:cNvSpPr/>
             <p:nvPr/>
           </p:nvSpPr>
@@ -3399,7 +3356,7 @@
         </p:sp>
         <p:sp>
           <p:nvSpPr>
-            <p:cNvPr id="28" name="tx28"/>
+            <p:cNvPr id="27" name="tx27"/>
             <p:cNvSpPr/>
             <p:nvPr/>
           </p:nvSpPr>
@@ -3445,7 +3402,7 @@
         </p:sp>
         <p:sp>
           <p:nvSpPr>
-            <p:cNvPr id="29" name="tx29"/>
+            <p:cNvPr id="28" name="tx28"/>
             <p:cNvSpPr/>
             <p:nvPr/>
           </p:nvSpPr>
@@ -3491,7 +3448,7 @@
         </p:sp>
         <p:sp>
           <p:nvSpPr>
-            <p:cNvPr id="30" name="tx30"/>
+            <p:cNvPr id="29" name="tx29"/>
             <p:cNvSpPr/>
             <p:nvPr/>
           </p:nvSpPr>
@@ -3537,7 +3494,7 @@
         </p:sp>
         <p:sp>
           <p:nvSpPr>
-            <p:cNvPr id="31" name="tx31"/>
+            <p:cNvPr id="30" name="tx30"/>
             <p:cNvSpPr/>
             <p:nvPr/>
           </p:nvSpPr>
@@ -3583,7 +3540,7 @@
         </p:sp>
         <p:sp>
           <p:nvSpPr>
-            <p:cNvPr id="32" name="pl32"/>
+            <p:cNvPr id="31" name="pl31"/>
             <p:cNvSpPr/>
             <p:nvPr/>
           </p:nvSpPr>
@@ -3623,7 +3580,7 @@
         </p:sp>
         <p:sp>
           <p:nvSpPr>
-            <p:cNvPr id="33" name="pl33"/>
+            <p:cNvPr id="32" name="pl32"/>
             <p:cNvSpPr/>
             <p:nvPr/>
           </p:nvSpPr>
@@ -3663,7 +3620,7 @@
         </p:sp>
         <p:sp>
           <p:nvSpPr>
-            <p:cNvPr id="34" name="tx34"/>
+            <p:cNvPr id="33" name="tx33"/>
             <p:cNvSpPr/>
             <p:nvPr/>
           </p:nvSpPr>
@@ -3709,7 +3666,7 @@
         </p:sp>
         <p:sp>
           <p:nvSpPr>
-            <p:cNvPr id="35" name="tx35"/>
+            <p:cNvPr id="34" name="tx34"/>
             <p:cNvSpPr/>
             <p:nvPr/>
           </p:nvSpPr>
@@ -3755,7 +3712,7 @@
         </p:sp>
         <p:sp>
           <p:nvSpPr>
-            <p:cNvPr id="36" name="tx36"/>
+            <p:cNvPr id="35" name="tx35"/>
             <p:cNvSpPr/>
             <p:nvPr/>
           </p:nvSpPr>
@@ -3794,14 +3751,14 @@
                   <a:latin typeface="Helvetica"/>
                   <a:cs typeface="Helvetica"/>
                 </a:rPr>
-                <a:t>Discrep &gt;= +25 vs &lt;+25: subHR = 6.32 (95% CI 1.00-39.79), p = 0.050</a:t>
+                <a:t>Discrep &gt;= +25 vs &lt;+25: subHR = 5.13 (95% CI 1.01-26.12), p = 0.049</a:t>
               </a:r>
             </a:p>
           </p:txBody>
         </p:sp>
         <p:sp>
           <p:nvSpPr>
-            <p:cNvPr id="37" name="tx37"/>
+            <p:cNvPr id="36" name="tx36"/>
             <p:cNvSpPr/>
             <p:nvPr/>
           </p:nvSpPr>

--- a/docs/plots/carbo/jx_carbo_adjcif_throm3.pptx
+++ b/docs/plots/carbo/jx_carbo_adjcif_throm3.pptx
@@ -2271,7 +2271,7 @@
           </p:nvSpPr>
           <p:spPr>
             <a:xfrm>
-              <a:off x="972874" y="5102376"/>
+              <a:off x="972874" y="5157129"/>
               <a:ext cx="7644336" cy="0"/>
             </a:xfrm>
             <a:custGeom>
@@ -2314,7 +2314,7 @@
           </p:nvSpPr>
           <p:spPr>
             <a:xfrm>
-              <a:off x="972874" y="4146285"/>
+              <a:off x="972874" y="4310543"/>
               <a:ext cx="7644336" cy="0"/>
             </a:xfrm>
             <a:custGeom>
@@ -2357,7 +2357,7 @@
           </p:nvSpPr>
           <p:spPr>
             <a:xfrm>
-              <a:off x="972874" y="3190193"/>
+              <a:off x="972874" y="3463957"/>
               <a:ext cx="7644336" cy="0"/>
             </a:xfrm>
             <a:custGeom>
@@ -2400,21 +2400,21 @@
           </p:nvSpPr>
           <p:spPr>
             <a:xfrm>
-              <a:off x="1413002" y="2583293"/>
-              <a:ext cx="0" cy="3139848"/>
+              <a:off x="972874" y="2617371"/>
+              <a:ext cx="7644336" cy="0"/>
             </a:xfrm>
             <a:custGeom>
               <a:avLst/>
               <a:pathLst>
-                <a:path w="0" h="3139848">
+                <a:path w="7644336" h="0">
                   <a:moveTo>
-                    <a:pt x="0" y="3139848"/>
+                    <a:pt x="0" y="0"/>
                   </a:moveTo>
                   <a:lnTo>
-                    <a:pt x="0" y="0"/>
-                  </a:lnTo>
-                  <a:lnTo>
-                    <a:pt x="0" y="0"/>
+                    <a:pt x="7644336" y="0"/>
+                  </a:lnTo>
+                  <a:lnTo>
+                    <a:pt x="7644336" y="0"/>
                   </a:lnTo>
                 </a:path>
               </a:pathLst>
@@ -2443,7 +2443,7 @@
           </p:nvSpPr>
           <p:spPr>
             <a:xfrm>
-              <a:off x="3266175" y="2583293"/>
+              <a:off x="1413002" y="2583293"/>
               <a:ext cx="0" cy="3139848"/>
             </a:xfrm>
             <a:custGeom>
@@ -2486,7 +2486,7 @@
           </p:nvSpPr>
           <p:spPr>
             <a:xfrm>
-              <a:off x="5119347" y="2583293"/>
+              <a:off x="3266175" y="2583293"/>
               <a:ext cx="0" cy="3139848"/>
             </a:xfrm>
             <a:custGeom>
@@ -2529,7 +2529,7 @@
           </p:nvSpPr>
           <p:spPr>
             <a:xfrm>
-              <a:off x="6972520" y="2583293"/>
+              <a:off x="5119347" y="2583293"/>
               <a:ext cx="0" cy="3139848"/>
             </a:xfrm>
             <a:custGeom>
@@ -2572,26 +2572,26 @@
           </p:nvSpPr>
           <p:spPr>
             <a:xfrm>
-              <a:off x="972874" y="5580422"/>
-              <a:ext cx="7644336" cy="0"/>
+              <a:off x="6972520" y="2583293"/>
+              <a:ext cx="0" cy="3139848"/>
             </a:xfrm>
             <a:custGeom>
               <a:avLst/>
               <a:pathLst>
-                <a:path w="7644336" h="0">
+                <a:path w="0" h="3139848">
                   <a:moveTo>
+                    <a:pt x="0" y="3139848"/>
+                  </a:moveTo>
+                  <a:lnTo>
                     <a:pt x="0" y="0"/>
-                  </a:moveTo>
-                  <a:lnTo>
-                    <a:pt x="7644336" y="0"/>
-                  </a:lnTo>
-                  <a:lnTo>
-                    <a:pt x="7644336" y="0"/>
+                  </a:lnTo>
+                  <a:lnTo>
+                    <a:pt x="0" y="0"/>
                   </a:lnTo>
                 </a:path>
               </a:pathLst>
             </a:custGeom>
-            <a:ln w="13550" cap="flat">
+            <a:ln w="6775" cap="flat">
               <a:solidFill>
                 <a:srgbClr val="EBEBEB">
                   <a:alpha val="100000"/>
@@ -2615,7 +2615,7 @@
           </p:nvSpPr>
           <p:spPr>
             <a:xfrm>
-              <a:off x="972874" y="4624330"/>
+              <a:off x="972874" y="5580422"/>
               <a:ext cx="7644336" cy="0"/>
             </a:xfrm>
             <a:custGeom>
@@ -2658,7 +2658,7 @@
           </p:nvSpPr>
           <p:spPr>
             <a:xfrm>
-              <a:off x="972874" y="3668239"/>
+              <a:off x="972874" y="4733836"/>
               <a:ext cx="7644336" cy="0"/>
             </a:xfrm>
             <a:custGeom>
@@ -2701,7 +2701,7 @@
           </p:nvSpPr>
           <p:spPr>
             <a:xfrm>
-              <a:off x="972874" y="2712148"/>
+              <a:off x="972874" y="3887250"/>
               <a:ext cx="7644336" cy="0"/>
             </a:xfrm>
             <a:custGeom>
@@ -2744,21 +2744,21 @@
           </p:nvSpPr>
           <p:spPr>
             <a:xfrm>
-              <a:off x="2339589" y="2583293"/>
-              <a:ext cx="0" cy="3139848"/>
+              <a:off x="972874" y="3040664"/>
+              <a:ext cx="7644336" cy="0"/>
             </a:xfrm>
             <a:custGeom>
               <a:avLst/>
               <a:pathLst>
-                <a:path w="0" h="3139848">
+                <a:path w="7644336" h="0">
                   <a:moveTo>
-                    <a:pt x="0" y="3139848"/>
+                    <a:pt x="0" y="0"/>
                   </a:moveTo>
                   <a:lnTo>
-                    <a:pt x="0" y="0"/>
-                  </a:lnTo>
-                  <a:lnTo>
-                    <a:pt x="0" y="0"/>
+                    <a:pt x="7644336" y="0"/>
+                  </a:lnTo>
+                  <a:lnTo>
+                    <a:pt x="7644336" y="0"/>
                   </a:lnTo>
                 </a:path>
               </a:pathLst>
@@ -2787,7 +2787,7 @@
           </p:nvSpPr>
           <p:spPr>
             <a:xfrm>
-              <a:off x="4192761" y="2583293"/>
+              <a:off x="2339589" y="2583293"/>
               <a:ext cx="0" cy="3139848"/>
             </a:xfrm>
             <a:custGeom>
@@ -2830,7 +2830,7 @@
           </p:nvSpPr>
           <p:spPr>
             <a:xfrm>
-              <a:off x="6045934" y="2583293"/>
+              <a:off x="4192761" y="2583293"/>
               <a:ext cx="0" cy="3139848"/>
             </a:xfrm>
             <a:custGeom>
@@ -2873,7 +2873,7 @@
           </p:nvSpPr>
           <p:spPr>
             <a:xfrm>
-              <a:off x="7899106" y="2583293"/>
+              <a:off x="6045934" y="2583293"/>
               <a:ext cx="0" cy="3139848"/>
             </a:xfrm>
             <a:custGeom>
@@ -2916,60 +2916,103 @@
           </p:nvSpPr>
           <p:spPr>
             <a:xfrm>
-              <a:off x="1320344" y="4981039"/>
-              <a:ext cx="6949396" cy="545357"/>
+              <a:off x="7899106" y="2583293"/>
+              <a:ext cx="0" cy="3139848"/>
             </a:xfrm>
             <a:custGeom>
               <a:avLst/>
               <a:pathLst>
-                <a:path w="6949396" h="545357">
+                <a:path w="0" h="3139848">
                   <a:moveTo>
-                    <a:pt x="0" y="545357"/>
+                    <a:pt x="0" y="3139848"/>
                   </a:moveTo>
                   <a:lnTo>
-                    <a:pt x="185317" y="545357"/>
-                  </a:lnTo>
-                  <a:lnTo>
-                    <a:pt x="185317" y="491413"/>
-                  </a:lnTo>
-                  <a:lnTo>
-                    <a:pt x="277975" y="491413"/>
-                  </a:lnTo>
-                  <a:lnTo>
-                    <a:pt x="277975" y="380649"/>
-                  </a:lnTo>
-                  <a:lnTo>
-                    <a:pt x="370634" y="380649"/>
-                  </a:lnTo>
-                  <a:lnTo>
-                    <a:pt x="370634" y="319351"/>
-                  </a:lnTo>
-                  <a:lnTo>
-                    <a:pt x="463293" y="319351"/>
-                  </a:lnTo>
-                  <a:lnTo>
-                    <a:pt x="463293" y="257264"/>
-                  </a:lnTo>
-                  <a:lnTo>
-                    <a:pt x="1945831" y="257264"/>
-                  </a:lnTo>
-                  <a:lnTo>
-                    <a:pt x="1945831" y="195473"/>
-                  </a:lnTo>
-                  <a:lnTo>
-                    <a:pt x="3243051" y="195473"/>
-                  </a:lnTo>
-                  <a:lnTo>
-                    <a:pt x="3243051" y="132975"/>
-                  </a:lnTo>
-                  <a:lnTo>
-                    <a:pt x="6300786" y="132975"/>
-                  </a:lnTo>
-                  <a:lnTo>
-                    <a:pt x="6300786" y="68377"/>
-                  </a:lnTo>
-                  <a:lnTo>
-                    <a:pt x="6949396" y="68377"/>
+                    <a:pt x="0" y="0"/>
+                  </a:lnTo>
+                  <a:lnTo>
+                    <a:pt x="0" y="0"/>
+                  </a:lnTo>
+                </a:path>
+              </a:pathLst>
+            </a:custGeom>
+            <a:ln w="13550" cap="flat">
+              <a:solidFill>
+                <a:srgbClr val="EBEBEB">
+                  <a:alpha val="100000"/>
+                </a:srgbClr>
+              </a:solidFill>
+              <a:prstDash val="solid"/>
+              <a:round/>
+            </a:ln>
+          </p:spPr>
+          <p:txBody>
+            <a:bodyPr/>
+            <a:lstStyle/>
+            <a:p/>
+          </p:txBody>
+        </p:sp>
+        <p:sp>
+          <p:nvSpPr>
+            <p:cNvPr id="20" name="pl20"/>
+            <p:cNvSpPr/>
+            <p:nvPr/>
+          </p:nvSpPr>
+          <p:spPr>
+            <a:xfrm>
+              <a:off x="1320344" y="5098260"/>
+              <a:ext cx="6949396" cy="438485"/>
+            </a:xfrm>
+            <a:custGeom>
+              <a:avLst/>
+              <a:pathLst>
+                <a:path w="6949396" h="438485">
+                  <a:moveTo>
+                    <a:pt x="0" y="438485"/>
+                  </a:moveTo>
+                  <a:lnTo>
+                    <a:pt x="185317" y="438485"/>
+                  </a:lnTo>
+                  <a:lnTo>
+                    <a:pt x="185317" y="394872"/>
+                  </a:lnTo>
+                  <a:lnTo>
+                    <a:pt x="277975" y="394872"/>
+                  </a:lnTo>
+                  <a:lnTo>
+                    <a:pt x="277975" y="305202"/>
+                  </a:lnTo>
+                  <a:lnTo>
+                    <a:pt x="370634" y="305202"/>
+                  </a:lnTo>
+                  <a:lnTo>
+                    <a:pt x="370634" y="256013"/>
+                  </a:lnTo>
+                  <a:lnTo>
+                    <a:pt x="463293" y="256013"/>
+                  </a:lnTo>
+                  <a:lnTo>
+                    <a:pt x="463293" y="206289"/>
+                  </a:lnTo>
+                  <a:lnTo>
+                    <a:pt x="1945831" y="206289"/>
+                  </a:lnTo>
+                  <a:lnTo>
+                    <a:pt x="1945831" y="156734"/>
+                  </a:lnTo>
+                  <a:lnTo>
+                    <a:pt x="3243051" y="156734"/>
+                  </a:lnTo>
+                  <a:lnTo>
+                    <a:pt x="3243051" y="106583"/>
+                  </a:lnTo>
+                  <a:lnTo>
+                    <a:pt x="6300786" y="106583"/>
+                  </a:lnTo>
+                  <a:lnTo>
+                    <a:pt x="6300786" y="54882"/>
+                  </a:lnTo>
+                  <a:lnTo>
+                    <a:pt x="6949396" y="54882"/>
                   </a:lnTo>
                   <a:lnTo>
                     <a:pt x="6949396" y="0"/>
@@ -2995,66 +3038,66 @@
         </p:sp>
         <p:sp>
           <p:nvSpPr>
-            <p:cNvPr id="20" name="pl20"/>
+            <p:cNvPr id="21" name="pl21"/>
             <p:cNvSpPr/>
             <p:nvPr/>
           </p:nvSpPr>
           <p:spPr>
             <a:xfrm>
               <a:off x="1320344" y="2861938"/>
-              <a:ext cx="6949396" cy="2444447"/>
+              <a:ext cx="6949396" cy="2445517"/>
             </a:xfrm>
             <a:custGeom>
               <a:avLst/>
               <a:pathLst>
-                <a:path w="6949396" h="2444447">
+                <a:path w="6949396" h="2445517">
                   <a:moveTo>
-                    <a:pt x="0" y="2444447"/>
+                    <a:pt x="0" y="2445517"/>
                   </a:moveTo>
                   <a:lnTo>
-                    <a:pt x="185317" y="2444447"/>
-                  </a:lnTo>
-                  <a:lnTo>
-                    <a:pt x="185317" y="2177094"/>
-                  </a:lnTo>
-                  <a:lnTo>
-                    <a:pt x="277975" y="2177094"/>
-                  </a:lnTo>
-                  <a:lnTo>
-                    <a:pt x="277975" y="1646976"/>
-                  </a:lnTo>
-                  <a:lnTo>
-                    <a:pt x="370634" y="1646976"/>
-                  </a:lnTo>
-                  <a:lnTo>
-                    <a:pt x="370634" y="1364047"/>
-                  </a:lnTo>
-                  <a:lnTo>
-                    <a:pt x="463293" y="1364047"/>
-                  </a:lnTo>
-                  <a:lnTo>
-                    <a:pt x="463293" y="1084731"/>
-                  </a:lnTo>
-                  <a:lnTo>
-                    <a:pt x="1945831" y="1084731"/>
-                  </a:lnTo>
-                  <a:lnTo>
-                    <a:pt x="1945831" y="813758"/>
-                  </a:lnTo>
-                  <a:lnTo>
-                    <a:pt x="3243051" y="813758"/>
-                  </a:lnTo>
-                  <a:lnTo>
-                    <a:pt x="3243051" y="546557"/>
-                  </a:lnTo>
-                  <a:lnTo>
-                    <a:pt x="6300786" y="546557"/>
-                  </a:lnTo>
-                  <a:lnTo>
-                    <a:pt x="6300786" y="277403"/>
-                  </a:lnTo>
-                  <a:lnTo>
-                    <a:pt x="6949396" y="277403"/>
+                    <a:pt x="185317" y="2445517"/>
+                  </a:lnTo>
+                  <a:lnTo>
+                    <a:pt x="185317" y="2178757"/>
+                  </a:lnTo>
+                  <a:lnTo>
+                    <a:pt x="277975" y="2178757"/>
+                  </a:lnTo>
+                  <a:lnTo>
+                    <a:pt x="277975" y="1647768"/>
+                  </a:lnTo>
+                  <a:lnTo>
+                    <a:pt x="370634" y="1647768"/>
+                  </a:lnTo>
+                  <a:lnTo>
+                    <a:pt x="370634" y="1366070"/>
+                  </a:lnTo>
+                  <a:lnTo>
+                    <a:pt x="463293" y="1366070"/>
+                  </a:lnTo>
+                  <a:lnTo>
+                    <a:pt x="463293" y="1087904"/>
+                  </a:lnTo>
+                  <a:lnTo>
+                    <a:pt x="1945831" y="1087904"/>
+                  </a:lnTo>
+                  <a:lnTo>
+                    <a:pt x="1945831" y="817062"/>
+                  </a:lnTo>
+                  <a:lnTo>
+                    <a:pt x="3243051" y="817062"/>
+                  </a:lnTo>
+                  <a:lnTo>
+                    <a:pt x="3243051" y="549223"/>
+                  </a:lnTo>
+                  <a:lnTo>
+                    <a:pt x="6300786" y="549223"/>
+                  </a:lnTo>
+                  <a:lnTo>
+                    <a:pt x="6300786" y="279490"/>
+                  </a:lnTo>
+                  <a:lnTo>
+                    <a:pt x="6949396" y="279490"/>
                   </a:lnTo>
                   <a:lnTo>
                     <a:pt x="6949396" y="0"/>
@@ -3080,7 +3123,7 @@
         </p:sp>
         <p:sp>
           <p:nvSpPr>
-            <p:cNvPr id="21" name="tx21"/>
+            <p:cNvPr id="22" name="tx22"/>
             <p:cNvSpPr/>
             <p:nvPr/>
           </p:nvSpPr>
@@ -3126,13 +3169,13 @@
         </p:sp>
         <p:sp>
           <p:nvSpPr>
-            <p:cNvPr id="22" name="tx22"/>
+            <p:cNvPr id="23" name="tx23"/>
             <p:cNvSpPr/>
             <p:nvPr/>
           </p:nvSpPr>
           <p:spPr>
             <a:xfrm>
-              <a:off x="692708" y="4584280"/>
+              <a:off x="692708" y="4693785"/>
               <a:ext cx="217535" cy="80101"/>
             </a:xfrm>
             <a:prstGeom prst="rect">
@@ -3172,13 +3215,13 @@
         </p:sp>
         <p:sp>
           <p:nvSpPr>
-            <p:cNvPr id="23" name="tx23"/>
+            <p:cNvPr id="24" name="tx24"/>
             <p:cNvSpPr/>
             <p:nvPr/>
           </p:nvSpPr>
           <p:spPr>
             <a:xfrm>
-              <a:off x="692708" y="3628188"/>
+              <a:off x="692708" y="3847199"/>
               <a:ext cx="217535" cy="80101"/>
             </a:xfrm>
             <a:prstGeom prst="rect">
@@ -3218,13 +3261,13 @@
         </p:sp>
         <p:sp>
           <p:nvSpPr>
-            <p:cNvPr id="24" name="tx24"/>
+            <p:cNvPr id="25" name="tx25"/>
             <p:cNvSpPr/>
             <p:nvPr/>
           </p:nvSpPr>
           <p:spPr>
             <a:xfrm>
-              <a:off x="692708" y="2672097"/>
+              <a:off x="692708" y="3000614"/>
               <a:ext cx="217535" cy="80101"/>
             </a:xfrm>
             <a:prstGeom prst="rect">
@@ -3264,7 +3307,7 @@
         </p:sp>
         <p:sp>
           <p:nvSpPr>
-            <p:cNvPr id="25" name="tx25"/>
+            <p:cNvPr id="26" name="tx26"/>
             <p:cNvSpPr/>
             <p:nvPr/>
           </p:nvSpPr>
@@ -3310,7 +3353,7 @@
         </p:sp>
         <p:sp>
           <p:nvSpPr>
-            <p:cNvPr id="26" name="tx26"/>
+            <p:cNvPr id="27" name="tx27"/>
             <p:cNvSpPr/>
             <p:nvPr/>
           </p:nvSpPr>
@@ -3356,7 +3399,7 @@
         </p:sp>
         <p:sp>
           <p:nvSpPr>
-            <p:cNvPr id="27" name="tx27"/>
+            <p:cNvPr id="28" name="tx28"/>
             <p:cNvSpPr/>
             <p:nvPr/>
           </p:nvSpPr>
@@ -3402,7 +3445,7 @@
         </p:sp>
         <p:sp>
           <p:nvSpPr>
-            <p:cNvPr id="28" name="tx28"/>
+            <p:cNvPr id="29" name="tx29"/>
             <p:cNvSpPr/>
             <p:nvPr/>
           </p:nvSpPr>
@@ -3448,7 +3491,7 @@
         </p:sp>
         <p:sp>
           <p:nvSpPr>
-            <p:cNvPr id="29" name="tx29"/>
+            <p:cNvPr id="30" name="tx30"/>
             <p:cNvSpPr/>
             <p:nvPr/>
           </p:nvSpPr>
@@ -3494,7 +3537,7 @@
         </p:sp>
         <p:sp>
           <p:nvSpPr>
-            <p:cNvPr id="30" name="tx30"/>
+            <p:cNvPr id="31" name="tx31"/>
             <p:cNvSpPr/>
             <p:nvPr/>
           </p:nvSpPr>
@@ -3540,7 +3583,7 @@
         </p:sp>
         <p:sp>
           <p:nvSpPr>
-            <p:cNvPr id="31" name="pl31"/>
+            <p:cNvPr id="32" name="pl32"/>
             <p:cNvSpPr/>
             <p:nvPr/>
           </p:nvSpPr>
@@ -3580,7 +3623,7 @@
         </p:sp>
         <p:sp>
           <p:nvSpPr>
-            <p:cNvPr id="32" name="pl32"/>
+            <p:cNvPr id="33" name="pl33"/>
             <p:cNvSpPr/>
             <p:nvPr/>
           </p:nvSpPr>
@@ -3620,7 +3663,7 @@
         </p:sp>
         <p:sp>
           <p:nvSpPr>
-            <p:cNvPr id="33" name="tx33"/>
+            <p:cNvPr id="34" name="tx34"/>
             <p:cNvSpPr/>
             <p:nvPr/>
           </p:nvSpPr>
@@ -3666,7 +3709,7 @@
         </p:sp>
         <p:sp>
           <p:nvSpPr>
-            <p:cNvPr id="34" name="tx34"/>
+            <p:cNvPr id="35" name="tx35"/>
             <p:cNvSpPr/>
             <p:nvPr/>
           </p:nvSpPr>
@@ -3712,7 +3755,7 @@
         </p:sp>
         <p:sp>
           <p:nvSpPr>
-            <p:cNvPr id="35" name="tx35"/>
+            <p:cNvPr id="36" name="tx36"/>
             <p:cNvSpPr/>
             <p:nvPr/>
           </p:nvSpPr>
@@ -3751,14 +3794,14 @@
                   <a:latin typeface="Helvetica"/>
                   <a:cs typeface="Helvetica"/>
                 </a:rPr>
-                <a:t>Discrep &gt;= +25 vs &lt;+25: subHR = 5.13 (95% CI 1.01-26.12), p = 0.049</a:t>
+                <a:t>Discrep &gt;= +25 vs &lt;+25: subHR = 6.32 (95% CI 1.00-39.79), p = 0.050</a:t>
               </a:r>
             </a:p>
           </p:txBody>
         </p:sp>
         <p:sp>
           <p:nvSpPr>
-            <p:cNvPr id="36" name="tx36"/>
+            <p:cNvPr id="37" name="tx37"/>
             <p:cNvSpPr/>
             <p:nvPr/>
           </p:nvSpPr>

--- a/docs/plots/carbo/jx_carbo_adjcif_throm3.pptx
+++ b/docs/plots/carbo/jx_carbo_adjcif_throm3.pptx
@@ -2357,7 +2357,7 @@
           </p:nvSpPr>
           <p:spPr>
             <a:xfrm>
-              <a:off x="972874" y="3463957"/>
+              <a:off x="972874" y="3463958"/>
               <a:ext cx="7644336" cy="0"/>
             </a:xfrm>
             <a:custGeom>
@@ -2400,7 +2400,7 @@
           </p:nvSpPr>
           <p:spPr>
             <a:xfrm>
-              <a:off x="972874" y="2617371"/>
+              <a:off x="972874" y="2617372"/>
               <a:ext cx="7644336" cy="0"/>
             </a:xfrm>
             <a:custGeom>
@@ -2701,7 +2701,7 @@
           </p:nvSpPr>
           <p:spPr>
             <a:xfrm>
-              <a:off x="972874" y="3887250"/>
+              <a:off x="972874" y="3887251"/>
               <a:ext cx="7644336" cy="0"/>
             </a:xfrm>
             <a:custGeom>
@@ -2744,7 +2744,7 @@
           </p:nvSpPr>
           <p:spPr>
             <a:xfrm>
-              <a:off x="972874" y="3040664"/>
+              <a:off x="972874" y="3040665"/>
               <a:ext cx="7644336" cy="0"/>
             </a:xfrm>
             <a:custGeom>
@@ -2979,10 +2979,10 @@
                     <a:pt x="277975" y="394872"/>
                   </a:lnTo>
                   <a:lnTo>
-                    <a:pt x="277975" y="305202"/>
-                  </a:lnTo>
-                  <a:lnTo>
-                    <a:pt x="370634" y="305202"/>
+                    <a:pt x="277975" y="305201"/>
+                  </a:lnTo>
+                  <a:lnTo>
+                    <a:pt x="370634" y="305201"/>
                   </a:lnTo>
                   <a:lnTo>
                     <a:pt x="370634" y="256013"/>
@@ -3003,10 +3003,10 @@
                     <a:pt x="3243051" y="156734"/>
                   </a:lnTo>
                   <a:lnTo>
-                    <a:pt x="3243051" y="106583"/>
-                  </a:lnTo>
-                  <a:lnTo>
-                    <a:pt x="6300786" y="106583"/>
+                    <a:pt x="3243051" y="106582"/>
+                  </a:lnTo>
+                  <a:lnTo>
+                    <a:pt x="6300786" y="106582"/>
                   </a:lnTo>
                   <a:lnTo>
                     <a:pt x="6300786" y="54882"/>
@@ -3221,7 +3221,7 @@
           </p:nvSpPr>
           <p:spPr>
             <a:xfrm>
-              <a:off x="692708" y="3847199"/>
+              <a:off x="692708" y="3847200"/>
               <a:ext cx="217535" cy="80101"/>
             </a:xfrm>
             <a:prstGeom prst="rect">

--- a/docs/plots/carbo/jx_carbo_adjcif_throm3.pptx
+++ b/docs/plots/carbo/jx_carbo_adjcif_throm3.pptx
@@ -2271,26 +2271,26 @@
           </p:nvSpPr>
           <p:spPr>
             <a:xfrm>
-              <a:off x="972874" y="5157129"/>
-              <a:ext cx="7644336" cy="0"/>
+              <a:off x="1113155" y="5103078"/>
+              <a:ext cx="7485076" cy="0"/>
             </a:xfrm>
             <a:custGeom>
               <a:avLst/>
               <a:pathLst>
-                <a:path w="7644336" h="0">
+                <a:path w="7485076" h="0">
                   <a:moveTo>
                     <a:pt x="0" y="0"/>
                   </a:moveTo>
                   <a:lnTo>
-                    <a:pt x="7644336" y="0"/>
-                  </a:lnTo>
-                  <a:lnTo>
-                    <a:pt x="7644336" y="0"/>
+                    <a:pt x="7485076" y="0"/>
+                  </a:lnTo>
+                  <a:lnTo>
+                    <a:pt x="7485076" y="0"/>
                   </a:lnTo>
                 </a:path>
               </a:pathLst>
             </a:custGeom>
-            <a:ln w="6775" cap="flat">
+            <a:ln w="8623" cap="flat">
               <a:solidFill>
                 <a:srgbClr val="EBEBEB">
                   <a:alpha val="100000"/>
@@ -2314,26 +2314,26 @@
           </p:nvSpPr>
           <p:spPr>
             <a:xfrm>
-              <a:off x="972874" y="4310543"/>
-              <a:ext cx="7644336" cy="0"/>
+              <a:off x="1113155" y="4339925"/>
+              <a:ext cx="7485076" cy="0"/>
             </a:xfrm>
             <a:custGeom>
               <a:avLst/>
               <a:pathLst>
-                <a:path w="7644336" h="0">
+                <a:path w="7485076" h="0">
                   <a:moveTo>
                     <a:pt x="0" y="0"/>
                   </a:moveTo>
                   <a:lnTo>
-                    <a:pt x="7644336" y="0"/>
-                  </a:lnTo>
-                  <a:lnTo>
-                    <a:pt x="7644336" y="0"/>
+                    <a:pt x="7485076" y="0"/>
+                  </a:lnTo>
+                  <a:lnTo>
+                    <a:pt x="7485076" y="0"/>
                   </a:lnTo>
                 </a:path>
               </a:pathLst>
             </a:custGeom>
-            <a:ln w="6775" cap="flat">
+            <a:ln w="8623" cap="flat">
               <a:solidFill>
                 <a:srgbClr val="EBEBEB">
                   <a:alpha val="100000"/>
@@ -2357,26 +2357,26 @@
           </p:nvSpPr>
           <p:spPr>
             <a:xfrm>
-              <a:off x="972874" y="3463958"/>
-              <a:ext cx="7644336" cy="0"/>
+              <a:off x="1113155" y="3576771"/>
+              <a:ext cx="7485076" cy="0"/>
             </a:xfrm>
             <a:custGeom>
               <a:avLst/>
               <a:pathLst>
-                <a:path w="7644336" h="0">
+                <a:path w="7485076" h="0">
                   <a:moveTo>
                     <a:pt x="0" y="0"/>
                   </a:moveTo>
                   <a:lnTo>
-                    <a:pt x="7644336" y="0"/>
-                  </a:lnTo>
-                  <a:lnTo>
-                    <a:pt x="7644336" y="0"/>
+                    <a:pt x="7485076" y="0"/>
+                  </a:lnTo>
+                  <a:lnTo>
+                    <a:pt x="7485076" y="0"/>
                   </a:lnTo>
                 </a:path>
               </a:pathLst>
             </a:custGeom>
-            <a:ln w="6775" cap="flat">
+            <a:ln w="8623" cap="flat">
               <a:solidFill>
                 <a:srgbClr val="EBEBEB">
                   <a:alpha val="100000"/>
@@ -2400,26 +2400,26 @@
           </p:nvSpPr>
           <p:spPr>
             <a:xfrm>
-              <a:off x="972874" y="2617372"/>
-              <a:ext cx="7644336" cy="0"/>
+              <a:off x="1113155" y="2813617"/>
+              <a:ext cx="7485076" cy="0"/>
             </a:xfrm>
             <a:custGeom>
               <a:avLst/>
               <a:pathLst>
-                <a:path w="7644336" h="0">
+                <a:path w="7485076" h="0">
                   <a:moveTo>
                     <a:pt x="0" y="0"/>
                   </a:moveTo>
                   <a:lnTo>
-                    <a:pt x="7644336" y="0"/>
-                  </a:lnTo>
-                  <a:lnTo>
-                    <a:pt x="7644336" y="0"/>
+                    <a:pt x="7485076" y="0"/>
+                  </a:lnTo>
+                  <a:lnTo>
+                    <a:pt x="7485076" y="0"/>
                   </a:lnTo>
                 </a:path>
               </a:pathLst>
             </a:custGeom>
-            <a:ln w="6775" cap="flat">
+            <a:ln w="8623" cap="flat">
               <a:solidFill>
                 <a:srgbClr val="EBEBEB">
                   <a:alpha val="100000"/>
@@ -2443,15 +2443,15 @@
           </p:nvSpPr>
           <p:spPr>
             <a:xfrm>
-              <a:off x="1413002" y="2583293"/>
-              <a:ext cx="0" cy="3139848"/>
+              <a:off x="1544114" y="2782896"/>
+              <a:ext cx="0" cy="2830414"/>
             </a:xfrm>
             <a:custGeom>
               <a:avLst/>
               <a:pathLst>
-                <a:path w="0" h="3139848">
+                <a:path w="0" h="2830414">
                   <a:moveTo>
-                    <a:pt x="0" y="3139848"/>
+                    <a:pt x="0" y="2830414"/>
                   </a:moveTo>
                   <a:lnTo>
                     <a:pt x="0" y="0"/>
@@ -2462,7 +2462,7 @@
                 </a:path>
               </a:pathLst>
             </a:custGeom>
-            <a:ln w="6775" cap="flat">
+            <a:ln w="8623" cap="flat">
               <a:solidFill>
                 <a:srgbClr val="EBEBEB">
                   <a:alpha val="100000"/>
@@ -2486,15 +2486,15 @@
           </p:nvSpPr>
           <p:spPr>
             <a:xfrm>
-              <a:off x="3266175" y="2583293"/>
-              <a:ext cx="0" cy="3139848"/>
+              <a:off x="3358678" y="2782896"/>
+              <a:ext cx="0" cy="2830414"/>
             </a:xfrm>
             <a:custGeom>
               <a:avLst/>
               <a:pathLst>
-                <a:path w="0" h="3139848">
+                <a:path w="0" h="2830414">
                   <a:moveTo>
-                    <a:pt x="0" y="3139848"/>
+                    <a:pt x="0" y="2830414"/>
                   </a:moveTo>
                   <a:lnTo>
                     <a:pt x="0" y="0"/>
@@ -2505,7 +2505,7 @@
                 </a:path>
               </a:pathLst>
             </a:custGeom>
-            <a:ln w="6775" cap="flat">
+            <a:ln w="8623" cap="flat">
               <a:solidFill>
                 <a:srgbClr val="EBEBEB">
                   <a:alpha val="100000"/>
@@ -2529,15 +2529,15 @@
           </p:nvSpPr>
           <p:spPr>
             <a:xfrm>
-              <a:off x="5119347" y="2583293"/>
-              <a:ext cx="0" cy="3139848"/>
+              <a:off x="5173242" y="2782896"/>
+              <a:ext cx="0" cy="2830414"/>
             </a:xfrm>
             <a:custGeom>
               <a:avLst/>
               <a:pathLst>
-                <a:path w="0" h="3139848">
+                <a:path w="0" h="2830414">
                   <a:moveTo>
-                    <a:pt x="0" y="3139848"/>
+                    <a:pt x="0" y="2830414"/>
                   </a:moveTo>
                   <a:lnTo>
                     <a:pt x="0" y="0"/>
@@ -2548,7 +2548,7 @@
                 </a:path>
               </a:pathLst>
             </a:custGeom>
-            <a:ln w="6775" cap="flat">
+            <a:ln w="8623" cap="flat">
               <a:solidFill>
                 <a:srgbClr val="EBEBEB">
                   <a:alpha val="100000"/>
@@ -2572,15 +2572,15 @@
           </p:nvSpPr>
           <p:spPr>
             <a:xfrm>
-              <a:off x="6972520" y="2583293"/>
-              <a:ext cx="0" cy="3139848"/>
+              <a:off x="6987806" y="2782896"/>
+              <a:ext cx="0" cy="2830414"/>
             </a:xfrm>
             <a:custGeom>
               <a:avLst/>
               <a:pathLst>
-                <a:path w="0" h="3139848">
+                <a:path w="0" h="2830414">
                   <a:moveTo>
-                    <a:pt x="0" y="3139848"/>
+                    <a:pt x="0" y="2830414"/>
                   </a:moveTo>
                   <a:lnTo>
                     <a:pt x="0" y="0"/>
@@ -2591,7 +2591,7 @@
                 </a:path>
               </a:pathLst>
             </a:custGeom>
-            <a:ln w="6775" cap="flat">
+            <a:ln w="8623" cap="flat">
               <a:solidFill>
                 <a:srgbClr val="EBEBEB">
                   <a:alpha val="100000"/>
@@ -2615,26 +2615,26 @@
           </p:nvSpPr>
           <p:spPr>
             <a:xfrm>
-              <a:off x="972874" y="5580422"/>
-              <a:ext cx="7644336" cy="0"/>
+              <a:off x="1113155" y="5484655"/>
+              <a:ext cx="7485076" cy="0"/>
             </a:xfrm>
             <a:custGeom>
               <a:avLst/>
               <a:pathLst>
-                <a:path w="7644336" h="0">
+                <a:path w="7485076" h="0">
                   <a:moveTo>
                     <a:pt x="0" y="0"/>
                   </a:moveTo>
                   <a:lnTo>
-                    <a:pt x="7644336" y="0"/>
-                  </a:lnTo>
-                  <a:lnTo>
-                    <a:pt x="7644336" y="0"/>
+                    <a:pt x="7485076" y="0"/>
+                  </a:lnTo>
+                  <a:lnTo>
+                    <a:pt x="7485076" y="0"/>
                   </a:lnTo>
                 </a:path>
               </a:pathLst>
             </a:custGeom>
-            <a:ln w="13550" cap="flat">
+            <a:ln w="17246" cap="flat">
               <a:solidFill>
                 <a:srgbClr val="EBEBEB">
                   <a:alpha val="100000"/>
@@ -2658,26 +2658,26 @@
           </p:nvSpPr>
           <p:spPr>
             <a:xfrm>
-              <a:off x="972874" y="4733836"/>
-              <a:ext cx="7644336" cy="0"/>
+              <a:off x="1113155" y="4721502"/>
+              <a:ext cx="7485076" cy="0"/>
             </a:xfrm>
             <a:custGeom>
               <a:avLst/>
               <a:pathLst>
-                <a:path w="7644336" h="0">
+                <a:path w="7485076" h="0">
                   <a:moveTo>
                     <a:pt x="0" y="0"/>
                   </a:moveTo>
                   <a:lnTo>
-                    <a:pt x="7644336" y="0"/>
-                  </a:lnTo>
-                  <a:lnTo>
-                    <a:pt x="7644336" y="0"/>
+                    <a:pt x="7485076" y="0"/>
+                  </a:lnTo>
+                  <a:lnTo>
+                    <a:pt x="7485076" y="0"/>
                   </a:lnTo>
                 </a:path>
               </a:pathLst>
             </a:custGeom>
-            <a:ln w="13550" cap="flat">
+            <a:ln w="17246" cap="flat">
               <a:solidFill>
                 <a:srgbClr val="EBEBEB">
                   <a:alpha val="100000"/>
@@ -2701,26 +2701,26 @@
           </p:nvSpPr>
           <p:spPr>
             <a:xfrm>
-              <a:off x="972874" y="3887251"/>
-              <a:ext cx="7644336" cy="0"/>
+              <a:off x="1113155" y="3958348"/>
+              <a:ext cx="7485076" cy="0"/>
             </a:xfrm>
             <a:custGeom>
               <a:avLst/>
               <a:pathLst>
-                <a:path w="7644336" h="0">
+                <a:path w="7485076" h="0">
                   <a:moveTo>
                     <a:pt x="0" y="0"/>
                   </a:moveTo>
                   <a:lnTo>
-                    <a:pt x="7644336" y="0"/>
-                  </a:lnTo>
-                  <a:lnTo>
-                    <a:pt x="7644336" y="0"/>
+                    <a:pt x="7485076" y="0"/>
+                  </a:lnTo>
+                  <a:lnTo>
+                    <a:pt x="7485076" y="0"/>
                   </a:lnTo>
                 </a:path>
               </a:pathLst>
             </a:custGeom>
-            <a:ln w="13550" cap="flat">
+            <a:ln w="17246" cap="flat">
               <a:solidFill>
                 <a:srgbClr val="EBEBEB">
                   <a:alpha val="100000"/>
@@ -2744,26 +2744,26 @@
           </p:nvSpPr>
           <p:spPr>
             <a:xfrm>
-              <a:off x="972874" y="3040665"/>
-              <a:ext cx="7644336" cy="0"/>
+              <a:off x="1113155" y="3195194"/>
+              <a:ext cx="7485076" cy="0"/>
             </a:xfrm>
             <a:custGeom>
               <a:avLst/>
               <a:pathLst>
-                <a:path w="7644336" h="0">
+                <a:path w="7485076" h="0">
                   <a:moveTo>
                     <a:pt x="0" y="0"/>
                   </a:moveTo>
                   <a:lnTo>
-                    <a:pt x="7644336" y="0"/>
-                  </a:lnTo>
-                  <a:lnTo>
-                    <a:pt x="7644336" y="0"/>
+                    <a:pt x="7485076" y="0"/>
+                  </a:lnTo>
+                  <a:lnTo>
+                    <a:pt x="7485076" y="0"/>
                   </a:lnTo>
                 </a:path>
               </a:pathLst>
             </a:custGeom>
-            <a:ln w="13550" cap="flat">
+            <a:ln w="17246" cap="flat">
               <a:solidFill>
                 <a:srgbClr val="EBEBEB">
                   <a:alpha val="100000"/>
@@ -2787,15 +2787,15 @@
           </p:nvSpPr>
           <p:spPr>
             <a:xfrm>
-              <a:off x="2339589" y="2583293"/>
-              <a:ext cx="0" cy="3139848"/>
+              <a:off x="2451396" y="2782896"/>
+              <a:ext cx="0" cy="2830414"/>
             </a:xfrm>
             <a:custGeom>
               <a:avLst/>
               <a:pathLst>
-                <a:path w="0" h="3139848">
+                <a:path w="0" h="2830414">
                   <a:moveTo>
-                    <a:pt x="0" y="3139848"/>
+                    <a:pt x="0" y="2830414"/>
                   </a:moveTo>
                   <a:lnTo>
                     <a:pt x="0" y="0"/>
@@ -2806,7 +2806,7 @@
                 </a:path>
               </a:pathLst>
             </a:custGeom>
-            <a:ln w="13550" cap="flat">
+            <a:ln w="17246" cap="flat">
               <a:solidFill>
                 <a:srgbClr val="EBEBEB">
                   <a:alpha val="100000"/>
@@ -2830,15 +2830,15 @@
           </p:nvSpPr>
           <p:spPr>
             <a:xfrm>
-              <a:off x="4192761" y="2583293"/>
-              <a:ext cx="0" cy="3139848"/>
+              <a:off x="4265960" y="2782896"/>
+              <a:ext cx="0" cy="2830414"/>
             </a:xfrm>
             <a:custGeom>
               <a:avLst/>
               <a:pathLst>
-                <a:path w="0" h="3139848">
+                <a:path w="0" h="2830414">
                   <a:moveTo>
-                    <a:pt x="0" y="3139848"/>
+                    <a:pt x="0" y="2830414"/>
                   </a:moveTo>
                   <a:lnTo>
                     <a:pt x="0" y="0"/>
@@ -2849,7 +2849,7 @@
                 </a:path>
               </a:pathLst>
             </a:custGeom>
-            <a:ln w="13550" cap="flat">
+            <a:ln w="17246" cap="flat">
               <a:solidFill>
                 <a:srgbClr val="EBEBEB">
                   <a:alpha val="100000"/>
@@ -2873,15 +2873,15 @@
           </p:nvSpPr>
           <p:spPr>
             <a:xfrm>
-              <a:off x="6045934" y="2583293"/>
-              <a:ext cx="0" cy="3139848"/>
+              <a:off x="6080524" y="2782896"/>
+              <a:ext cx="0" cy="2830414"/>
             </a:xfrm>
             <a:custGeom>
               <a:avLst/>
               <a:pathLst>
-                <a:path w="0" h="3139848">
+                <a:path w="0" h="2830414">
                   <a:moveTo>
-                    <a:pt x="0" y="3139848"/>
+                    <a:pt x="0" y="2830414"/>
                   </a:moveTo>
                   <a:lnTo>
                     <a:pt x="0" y="0"/>
@@ -2892,7 +2892,7 @@
                 </a:path>
               </a:pathLst>
             </a:custGeom>
-            <a:ln w="13550" cap="flat">
+            <a:ln w="17246" cap="flat">
               <a:solidFill>
                 <a:srgbClr val="EBEBEB">
                   <a:alpha val="100000"/>
@@ -2916,15 +2916,15 @@
           </p:nvSpPr>
           <p:spPr>
             <a:xfrm>
-              <a:off x="7899106" y="2583293"/>
-              <a:ext cx="0" cy="3139848"/>
+              <a:off x="7895088" y="2782896"/>
+              <a:ext cx="0" cy="2830414"/>
             </a:xfrm>
             <a:custGeom>
               <a:avLst/>
               <a:pathLst>
-                <a:path w="0" h="3139848">
+                <a:path w="0" h="2830414">
                   <a:moveTo>
-                    <a:pt x="0" y="3139848"/>
+                    <a:pt x="0" y="2830414"/>
                   </a:moveTo>
                   <a:lnTo>
                     <a:pt x="0" y="0"/>
@@ -2935,7 +2935,7 @@
                 </a:path>
               </a:pathLst>
             </a:custGeom>
-            <a:ln w="13550" cap="flat">
+            <a:ln w="17246" cap="flat">
               <a:solidFill>
                 <a:srgbClr val="EBEBEB">
                   <a:alpha val="100000"/>
@@ -2959,63 +2959,63 @@
           </p:nvSpPr>
           <p:spPr>
             <a:xfrm>
-              <a:off x="1320344" y="5098260"/>
-              <a:ext cx="6949396" cy="438485"/>
+              <a:off x="1453386" y="5050011"/>
+              <a:ext cx="6804615" cy="395272"/>
             </a:xfrm>
             <a:custGeom>
               <a:avLst/>
               <a:pathLst>
-                <a:path w="6949396" h="438485">
+                <a:path w="6804615" h="395272">
                   <a:moveTo>
-                    <a:pt x="0" y="438485"/>
+                    <a:pt x="0" y="395272"/>
                   </a:moveTo>
                   <a:lnTo>
-                    <a:pt x="185317" y="438485"/>
-                  </a:lnTo>
-                  <a:lnTo>
-                    <a:pt x="185317" y="394872"/>
-                  </a:lnTo>
-                  <a:lnTo>
-                    <a:pt x="277975" y="394872"/>
-                  </a:lnTo>
-                  <a:lnTo>
-                    <a:pt x="277975" y="305201"/>
-                  </a:lnTo>
-                  <a:lnTo>
-                    <a:pt x="370634" y="305201"/>
-                  </a:lnTo>
-                  <a:lnTo>
-                    <a:pt x="370634" y="256013"/>
-                  </a:lnTo>
-                  <a:lnTo>
-                    <a:pt x="463293" y="256013"/>
-                  </a:lnTo>
-                  <a:lnTo>
-                    <a:pt x="463293" y="206289"/>
-                  </a:lnTo>
-                  <a:lnTo>
-                    <a:pt x="1945831" y="206289"/>
-                  </a:lnTo>
-                  <a:lnTo>
-                    <a:pt x="1945831" y="156734"/>
-                  </a:lnTo>
-                  <a:lnTo>
-                    <a:pt x="3243051" y="156734"/>
-                  </a:lnTo>
-                  <a:lnTo>
-                    <a:pt x="3243051" y="106582"/>
-                  </a:lnTo>
-                  <a:lnTo>
-                    <a:pt x="6300786" y="106582"/>
-                  </a:lnTo>
-                  <a:lnTo>
-                    <a:pt x="6300786" y="54882"/>
-                  </a:lnTo>
-                  <a:lnTo>
-                    <a:pt x="6949396" y="54882"/>
-                  </a:lnTo>
-                  <a:lnTo>
-                    <a:pt x="6949396" y="0"/>
+                    <a:pt x="181456" y="395272"/>
+                  </a:lnTo>
+                  <a:lnTo>
+                    <a:pt x="181456" y="355957"/>
+                  </a:lnTo>
+                  <a:lnTo>
+                    <a:pt x="272184" y="355957"/>
+                  </a:lnTo>
+                  <a:lnTo>
+                    <a:pt x="272184" y="275124"/>
+                  </a:lnTo>
+                  <a:lnTo>
+                    <a:pt x="362912" y="275124"/>
+                  </a:lnTo>
+                  <a:lnTo>
+                    <a:pt x="362912" y="230783"/>
+                  </a:lnTo>
+                  <a:lnTo>
+                    <a:pt x="453641" y="230783"/>
+                  </a:lnTo>
+                  <a:lnTo>
+                    <a:pt x="453641" y="185959"/>
+                  </a:lnTo>
+                  <a:lnTo>
+                    <a:pt x="1905292" y="185959"/>
+                  </a:lnTo>
+                  <a:lnTo>
+                    <a:pt x="1905292" y="141288"/>
+                  </a:lnTo>
+                  <a:lnTo>
+                    <a:pt x="3175487" y="141288"/>
+                  </a:lnTo>
+                  <a:lnTo>
+                    <a:pt x="3175487" y="96079"/>
+                  </a:lnTo>
+                  <a:lnTo>
+                    <a:pt x="6169517" y="96079"/>
+                  </a:lnTo>
+                  <a:lnTo>
+                    <a:pt x="6169517" y="49473"/>
+                  </a:lnTo>
+                  <a:lnTo>
+                    <a:pt x="6804615" y="49473"/>
+                  </a:lnTo>
+                  <a:lnTo>
+                    <a:pt x="6804615" y="0"/>
                   </a:lnTo>
                 </a:path>
               </a:pathLst>
@@ -3044,63 +3044,63 @@
           </p:nvSpPr>
           <p:spPr>
             <a:xfrm>
-              <a:off x="1320344" y="2861938"/>
-              <a:ext cx="6949396" cy="2445517"/>
+              <a:off x="1453386" y="3034080"/>
+              <a:ext cx="6804615" cy="2204509"/>
             </a:xfrm>
             <a:custGeom>
               <a:avLst/>
               <a:pathLst>
-                <a:path w="6949396" h="2445517">
+                <a:path w="6804615" h="2204509">
                   <a:moveTo>
-                    <a:pt x="0" y="2445517"/>
+                    <a:pt x="0" y="2204509"/>
                   </a:moveTo>
                   <a:lnTo>
-                    <a:pt x="185317" y="2445517"/>
-                  </a:lnTo>
-                  <a:lnTo>
-                    <a:pt x="185317" y="2178757"/>
-                  </a:lnTo>
-                  <a:lnTo>
-                    <a:pt x="277975" y="2178757"/>
-                  </a:lnTo>
-                  <a:lnTo>
-                    <a:pt x="277975" y="1647768"/>
-                  </a:lnTo>
-                  <a:lnTo>
-                    <a:pt x="370634" y="1647768"/>
-                  </a:lnTo>
-                  <a:lnTo>
-                    <a:pt x="370634" y="1366070"/>
-                  </a:lnTo>
-                  <a:lnTo>
-                    <a:pt x="463293" y="1366070"/>
-                  </a:lnTo>
-                  <a:lnTo>
-                    <a:pt x="463293" y="1087904"/>
-                  </a:lnTo>
-                  <a:lnTo>
-                    <a:pt x="1945831" y="1087904"/>
-                  </a:lnTo>
-                  <a:lnTo>
-                    <a:pt x="1945831" y="817062"/>
-                  </a:lnTo>
-                  <a:lnTo>
-                    <a:pt x="3243051" y="817062"/>
-                  </a:lnTo>
-                  <a:lnTo>
-                    <a:pt x="3243051" y="549223"/>
-                  </a:lnTo>
-                  <a:lnTo>
-                    <a:pt x="6300786" y="549223"/>
-                  </a:lnTo>
-                  <a:lnTo>
-                    <a:pt x="6300786" y="279490"/>
-                  </a:lnTo>
-                  <a:lnTo>
-                    <a:pt x="6949396" y="279490"/>
-                  </a:lnTo>
-                  <a:lnTo>
-                    <a:pt x="6949396" y="0"/>
+                    <a:pt x="181456" y="2204509"/>
+                  </a:lnTo>
+                  <a:lnTo>
+                    <a:pt x="181456" y="1964039"/>
+                  </a:lnTo>
+                  <a:lnTo>
+                    <a:pt x="272184" y="1964039"/>
+                  </a:lnTo>
+                  <a:lnTo>
+                    <a:pt x="272184" y="1485379"/>
+                  </a:lnTo>
+                  <a:lnTo>
+                    <a:pt x="362912" y="1485379"/>
+                  </a:lnTo>
+                  <a:lnTo>
+                    <a:pt x="362912" y="1231443"/>
+                  </a:lnTo>
+                  <a:lnTo>
+                    <a:pt x="453641" y="1231443"/>
+                  </a:lnTo>
+                  <a:lnTo>
+                    <a:pt x="453641" y="980690"/>
+                  </a:lnTo>
+                  <a:lnTo>
+                    <a:pt x="1905292" y="980690"/>
+                  </a:lnTo>
+                  <a:lnTo>
+                    <a:pt x="1905292" y="736540"/>
+                  </a:lnTo>
+                  <a:lnTo>
+                    <a:pt x="3175487" y="736540"/>
+                  </a:lnTo>
+                  <a:lnTo>
+                    <a:pt x="3175487" y="495097"/>
+                  </a:lnTo>
+                  <a:lnTo>
+                    <a:pt x="6169517" y="495097"/>
+                  </a:lnTo>
+                  <a:lnTo>
+                    <a:pt x="6169517" y="251946"/>
+                  </a:lnTo>
+                  <a:lnTo>
+                    <a:pt x="6804615" y="251946"/>
+                  </a:lnTo>
+                  <a:lnTo>
+                    <a:pt x="6804615" y="0"/>
                   </a:lnTo>
                 </a:path>
               </a:pathLst>
@@ -3129,8 +3129,8 @@
           </p:nvSpPr>
           <p:spPr>
             <a:xfrm>
-              <a:off x="692708" y="5540371"/>
-              <a:ext cx="217535" cy="80101"/>
+              <a:off x="756929" y="5433678"/>
+              <a:ext cx="276514" cy="101955"/>
             </a:xfrm>
             <a:prstGeom prst="rect">
               <a:avLst/>
@@ -3143,7 +3143,7 @@
             <a:p>
               <a:pPr algn="l" marL="0" marR="0" indent="0">
                 <a:lnSpc>
-                  <a:spcPts val="880"/>
+                  <a:spcPts val="1120"/>
                 </a:lnSpc>
                 <a:spcBef>
                   <a:spcPts val="0"/>
@@ -3153,7 +3153,7 @@
                 </a:spcAft>
               </a:pPr>
               <a:r>
-                <a:rPr sz="880">
+                <a:rPr sz="1120">
                   <a:solidFill>
                     <a:srgbClr val="4D4D4D">
                       <a:alpha val="100000"/>
@@ -3175,8 +3175,8 @@
           </p:nvSpPr>
           <p:spPr>
             <a:xfrm>
-              <a:off x="692708" y="4693785"/>
-              <a:ext cx="217535" cy="80101"/>
+              <a:off x="756929" y="4670524"/>
+              <a:ext cx="276514" cy="101955"/>
             </a:xfrm>
             <a:prstGeom prst="rect">
               <a:avLst/>
@@ -3189,7 +3189,7 @@
             <a:p>
               <a:pPr algn="l" marL="0" marR="0" indent="0">
                 <a:lnSpc>
-                  <a:spcPts val="880"/>
+                  <a:spcPts val="1120"/>
                 </a:lnSpc>
                 <a:spcBef>
                   <a:spcPts val="0"/>
@@ -3199,7 +3199,7 @@
                 </a:spcAft>
               </a:pPr>
               <a:r>
-                <a:rPr sz="880">
+                <a:rPr sz="1120">
                   <a:solidFill>
                     <a:srgbClr val="4D4D4D">
                       <a:alpha val="100000"/>
@@ -3221,8 +3221,8 @@
           </p:nvSpPr>
           <p:spPr>
             <a:xfrm>
-              <a:off x="692708" y="3847200"/>
-              <a:ext cx="217535" cy="80101"/>
+              <a:off x="756929" y="3907370"/>
+              <a:ext cx="276514" cy="101955"/>
             </a:xfrm>
             <a:prstGeom prst="rect">
               <a:avLst/>
@@ -3235,7 +3235,7 @@
             <a:p>
               <a:pPr algn="l" marL="0" marR="0" indent="0">
                 <a:lnSpc>
-                  <a:spcPts val="880"/>
+                  <a:spcPts val="1120"/>
                 </a:lnSpc>
                 <a:spcBef>
                   <a:spcPts val="0"/>
@@ -3245,7 +3245,7 @@
                 </a:spcAft>
               </a:pPr>
               <a:r>
-                <a:rPr sz="880">
+                <a:rPr sz="1120">
                   <a:solidFill>
                     <a:srgbClr val="4D4D4D">
                       <a:alpha val="100000"/>
@@ -3267,8 +3267,8 @@
           </p:nvSpPr>
           <p:spPr>
             <a:xfrm>
-              <a:off x="692708" y="3000614"/>
-              <a:ext cx="217535" cy="80101"/>
+              <a:off x="756929" y="3144216"/>
+              <a:ext cx="276514" cy="101955"/>
             </a:xfrm>
             <a:prstGeom prst="rect">
               <a:avLst/>
@@ -3281,7 +3281,7 @@
             <a:p>
               <a:pPr algn="l" marL="0" marR="0" indent="0">
                 <a:lnSpc>
-                  <a:spcPts val="880"/>
+                  <a:spcPts val="1120"/>
                 </a:lnSpc>
                 <a:spcBef>
                   <a:spcPts val="0"/>
@@ -3291,7 +3291,7 @@
                 </a:spcAft>
               </a:pPr>
               <a:r>
-                <a:rPr sz="880">
+                <a:rPr sz="1120">
                   <a:solidFill>
                     <a:srgbClr val="4D4D4D">
                       <a:alpha val="100000"/>
@@ -3313,8 +3313,8 @@
           </p:nvSpPr>
           <p:spPr>
             <a:xfrm>
-              <a:off x="2277409" y="5785772"/>
-              <a:ext cx="124358" cy="80101"/>
+              <a:off x="2372392" y="5693022"/>
+              <a:ext cx="158008" cy="101955"/>
             </a:xfrm>
             <a:prstGeom prst="rect">
               <a:avLst/>
@@ -3327,7 +3327,7 @@
             <a:p>
               <a:pPr algn="l" marL="0" marR="0" indent="0">
                 <a:lnSpc>
-                  <a:spcPts val="880"/>
+                  <a:spcPts val="1120"/>
                 </a:lnSpc>
                 <a:spcBef>
                   <a:spcPts val="0"/>
@@ -3337,7 +3337,7 @@
                 </a:spcAft>
               </a:pPr>
               <a:r>
-                <a:rPr sz="880">
+                <a:rPr sz="1120">
                   <a:solidFill>
                     <a:srgbClr val="4D4D4D">
                       <a:alpha val="100000"/>
@@ -3359,8 +3359,8 @@
           </p:nvSpPr>
           <p:spPr>
             <a:xfrm>
-              <a:off x="4130582" y="5785772"/>
-              <a:ext cx="124358" cy="80101"/>
+              <a:off x="4186956" y="5693022"/>
+              <a:ext cx="158008" cy="101955"/>
             </a:xfrm>
             <a:prstGeom prst="rect">
               <a:avLst/>
@@ -3373,7 +3373,7 @@
             <a:p>
               <a:pPr algn="l" marL="0" marR="0" indent="0">
                 <a:lnSpc>
-                  <a:spcPts val="880"/>
+                  <a:spcPts val="1120"/>
                 </a:lnSpc>
                 <a:spcBef>
                   <a:spcPts val="0"/>
@@ -3383,7 +3383,7 @@
                 </a:spcAft>
               </a:pPr>
               <a:r>
-                <a:rPr sz="880">
+                <a:rPr sz="1120">
                   <a:solidFill>
                     <a:srgbClr val="4D4D4D">
                       <a:alpha val="100000"/>
@@ -3405,8 +3405,8 @@
           </p:nvSpPr>
           <p:spPr>
             <a:xfrm>
-              <a:off x="5983754" y="5785772"/>
-              <a:ext cx="124358" cy="80101"/>
+              <a:off x="6001520" y="5693022"/>
+              <a:ext cx="158008" cy="101955"/>
             </a:xfrm>
             <a:prstGeom prst="rect">
               <a:avLst/>
@@ -3419,7 +3419,7 @@
             <a:p>
               <a:pPr algn="l" marL="0" marR="0" indent="0">
                 <a:lnSpc>
-                  <a:spcPts val="880"/>
+                  <a:spcPts val="1120"/>
                 </a:lnSpc>
                 <a:spcBef>
                   <a:spcPts val="0"/>
@@ -3429,7 +3429,7 @@
                 </a:spcAft>
               </a:pPr>
               <a:r>
-                <a:rPr sz="880">
+                <a:rPr sz="1120">
                   <a:solidFill>
                     <a:srgbClr val="4D4D4D">
                       <a:alpha val="100000"/>
@@ -3451,8 +3451,8 @@
           </p:nvSpPr>
           <p:spPr>
             <a:xfrm>
-              <a:off x="7836927" y="5785772"/>
-              <a:ext cx="124358" cy="80101"/>
+              <a:off x="7816084" y="5693022"/>
+              <a:ext cx="158008" cy="101955"/>
             </a:xfrm>
             <a:prstGeom prst="rect">
               <a:avLst/>
@@ -3465,7 +3465,7 @@
             <a:p>
               <a:pPr algn="l" marL="0" marR="0" indent="0">
                 <a:lnSpc>
-                  <a:spcPts val="880"/>
+                  <a:spcPts val="1120"/>
                 </a:lnSpc>
                 <a:spcBef>
                   <a:spcPts val="0"/>
@@ -3475,7 +3475,7 @@
                 </a:spcAft>
               </a:pPr>
               <a:r>
-                <a:rPr sz="880">
+                <a:rPr sz="1120">
                   <a:solidFill>
                     <a:srgbClr val="4D4D4D">
                       <a:alpha val="100000"/>
@@ -3497,8 +3497,8 @@
           </p:nvSpPr>
           <p:spPr>
             <a:xfrm>
-              <a:off x="4197162" y="5925448"/>
-              <a:ext cx="1195760" cy="100218"/>
+              <a:off x="4094958" y="5870717"/>
+              <a:ext cx="1521470" cy="127558"/>
             </a:xfrm>
             <a:prstGeom prst="rect">
               <a:avLst/>
@@ -3511,7 +3511,7 @@
             <a:p>
               <a:pPr algn="l" marL="0" marR="0" indent="0">
                 <a:lnSpc>
-                  <a:spcPts val="1100"/>
+                  <a:spcPts val="1400"/>
                 </a:lnSpc>
                 <a:spcBef>
                   <a:spcPts val="0"/>
@@ -3521,7 +3521,7 @@
                 </a:spcAft>
               </a:pPr>
               <a:r>
-                <a:rPr sz="1100">
+                <a:rPr sz="1400">
                   <a:solidFill>
                     <a:srgbClr val="000000">
                       <a:alpha val="100000"/>
@@ -3543,8 +3543,8 @@
           </p:nvSpPr>
           <p:spPr>
             <a:xfrm rot="-5400000">
-              <a:off x="-87047" y="4103109"/>
-              <a:ext cx="1327891" cy="100218"/>
+              <a:off x="-235221" y="4134324"/>
+              <a:ext cx="1689536" cy="127558"/>
             </a:xfrm>
             <a:prstGeom prst="rect">
               <a:avLst/>
@@ -3557,7 +3557,7 @@
             <a:p>
               <a:pPr algn="l" marL="0" marR="0" indent="0">
                 <a:lnSpc>
-                  <a:spcPts val="1100"/>
+                  <a:spcPts val="1400"/>
                 </a:lnSpc>
                 <a:spcBef>
                   <a:spcPts val="0"/>
@@ -3567,7 +3567,7 @@
                 </a:spcAft>
               </a:pPr>
               <a:r>
-                <a:rPr sz="1100">
+                <a:rPr sz="1400">
                   <a:solidFill>
                     <a:srgbClr val="000000">
                       <a:alpha val="100000"/>
@@ -3589,7 +3589,7 @@
           </p:nvSpPr>
           <p:spPr>
             <a:xfrm>
-              <a:off x="3578565" y="2264798"/>
+              <a:off x="3362626" y="2407465"/>
               <a:ext cx="175564" cy="0"/>
             </a:xfrm>
             <a:custGeom>
@@ -3629,7 +3629,7 @@
           </p:nvSpPr>
           <p:spPr>
             <a:xfrm>
-              <a:off x="4819138" y="2264798"/>
+              <a:off x="4880455" y="2407465"/>
               <a:ext cx="175564" cy="0"/>
             </a:xfrm>
             <a:custGeom>
@@ -3669,8 +3669,8 @@
           </p:nvSpPr>
           <p:spPr>
             <a:xfrm>
-              <a:off x="3845665" y="2224748"/>
-              <a:ext cx="881938" cy="80101"/>
+              <a:off x="3648704" y="2356487"/>
+              <a:ext cx="1121237" cy="101955"/>
             </a:xfrm>
             <a:prstGeom prst="rect">
               <a:avLst/>
@@ -3683,7 +3683,7 @@
             <a:p>
               <a:pPr algn="l" marL="0" marR="0" indent="0">
                 <a:lnSpc>
-                  <a:spcPts val="880"/>
+                  <a:spcPts val="1120"/>
                 </a:lnSpc>
                 <a:spcBef>
                   <a:spcPts val="0"/>
@@ -3693,7 +3693,7 @@
                 </a:spcAft>
               </a:pPr>
               <a:r>
-                <a:rPr sz="880">
+                <a:rPr sz="1120">
                   <a:solidFill>
                     <a:srgbClr val="000000">
                       <a:alpha val="100000"/>
@@ -3715,8 +3715,8 @@
           </p:nvSpPr>
           <p:spPr>
             <a:xfrm>
-              <a:off x="5086238" y="2224748"/>
-              <a:ext cx="947226" cy="80101"/>
+              <a:off x="5166533" y="2356487"/>
+              <a:ext cx="1204173" cy="101955"/>
             </a:xfrm>
             <a:prstGeom prst="rect">
               <a:avLst/>
@@ -3729,7 +3729,7 @@
             <a:p>
               <a:pPr algn="l" marL="0" marR="0" indent="0">
                 <a:lnSpc>
-                  <a:spcPts val="880"/>
+                  <a:spcPts val="1120"/>
                 </a:lnSpc>
                 <a:spcBef>
                   <a:spcPts val="0"/>
@@ -3739,7 +3739,7 @@
                 </a:spcAft>
               </a:pPr>
               <a:r>
-                <a:rPr sz="880">
+                <a:rPr sz="1120">
                   <a:solidFill>
                     <a:srgbClr val="000000">
                       <a:alpha val="100000"/>
@@ -3761,8 +3761,8 @@
           </p:nvSpPr>
           <p:spPr>
             <a:xfrm>
-              <a:off x="972874" y="1896563"/>
-              <a:ext cx="3984498" cy="91165"/>
+              <a:off x="1113155" y="1977589"/>
+              <a:ext cx="4782220" cy="109362"/>
             </a:xfrm>
             <a:prstGeom prst="rect">
               <a:avLst/>
@@ -3775,7 +3775,7 @@
             <a:p>
               <a:pPr algn="l" marL="0" marR="0" indent="0">
                 <a:lnSpc>
-                  <a:spcPts val="1000"/>
+                  <a:spcPts val="1200"/>
                 </a:lnSpc>
                 <a:spcBef>
                   <a:spcPts val="0"/>
@@ -3785,7 +3785,7 @@
                 </a:spcAft>
               </a:pPr>
               <a:r>
-                <a:rPr sz="1000">
+                <a:rPr sz="1200">
                   <a:solidFill>
                     <a:srgbClr val="404040">
                       <a:alpha val="100000"/>
@@ -3807,8 +3807,8 @@
           </p:nvSpPr>
           <p:spPr>
             <a:xfrm>
-              <a:off x="972874" y="1669789"/>
-              <a:ext cx="2039386" cy="120152"/>
+              <a:off x="1113155" y="1688767"/>
+              <a:ext cx="2596164" cy="153070"/>
             </a:xfrm>
             <a:prstGeom prst="rect">
               <a:avLst/>
@@ -3821,7 +3821,7 @@
             <a:p>
               <a:pPr algn="l" marL="0" marR="0" indent="0">
                 <a:lnSpc>
-                  <a:spcPts val="1320"/>
+                  <a:spcPts val="1680"/>
                 </a:lnSpc>
                 <a:spcBef>
                   <a:spcPts val="0"/>
@@ -3831,7 +3831,7 @@
                 </a:spcAft>
               </a:pPr>
               <a:r>
-                <a:rPr sz="1320">
+                <a:rPr sz="1680">
                   <a:solidFill>
                     <a:srgbClr val="000000">
                       <a:alpha val="100000"/>
